--- a/Data Mining and Analytics -21CSE355T/Unit-5/PPT/5_DataMining_RecommenderSystems.pptx
+++ b/Data Mining and Analytics -21CSE355T/Unit-5/PPT/5_DataMining_RecommenderSystems.pptx
@@ -69,20 +69,192 @@
             <a:noAutofit/>
           </a:bodyPr>
           <a:p>
-            <a:r>
-              <a:rPr b="0" lang="en-US" sz="1800" spc="-1" strike="noStrike">
-                <a:solidFill>
-                  <a:schemeClr val="dk1"/>
-                </a:solidFill>
-                <a:latin typeface="Calibri"/>
-              </a:rPr>
-              <a:t>Click to move the slide</a:t>
-            </a:r>
-            <a:endParaRPr b="0" lang="en-US" sz="1800" spc="-1" strike="noStrike">
-              <a:solidFill>
-                <a:schemeClr val="dk1"/>
-              </a:solidFill>
-              <a:latin typeface="Calibri"/>
+            <a:pPr algn="ctr"/>
+            <a:r>
+              <a:rPr b="0" lang="en-US" sz="4400" spc="-1" strike="noStrike">
+                <a:solidFill>
+                  <a:srgbClr val="000000"/>
+                </a:solidFill>
+                <a:latin typeface="Arial"/>
+              </a:rPr>
+              <a:t>C</a:t>
+            </a:r>
+            <a:r>
+              <a:rPr b="0" lang="en-US" sz="4400" spc="-1" strike="noStrike">
+                <a:solidFill>
+                  <a:srgbClr val="000000"/>
+                </a:solidFill>
+                <a:latin typeface="Arial"/>
+              </a:rPr>
+              <a:t>li</a:t>
+            </a:r>
+            <a:r>
+              <a:rPr b="0" lang="en-US" sz="4400" spc="-1" strike="noStrike">
+                <a:solidFill>
+                  <a:srgbClr val="000000"/>
+                </a:solidFill>
+                <a:latin typeface="Arial"/>
+              </a:rPr>
+              <a:t>c</a:t>
+            </a:r>
+            <a:r>
+              <a:rPr b="0" lang="en-US" sz="4400" spc="-1" strike="noStrike">
+                <a:solidFill>
+                  <a:srgbClr val="000000"/>
+                </a:solidFill>
+                <a:latin typeface="Arial"/>
+              </a:rPr>
+              <a:t>k </a:t>
+            </a:r>
+            <a:r>
+              <a:rPr b="0" lang="en-US" sz="4400" spc="-1" strike="noStrike">
+                <a:solidFill>
+                  <a:srgbClr val="000000"/>
+                </a:solidFill>
+                <a:latin typeface="Arial"/>
+              </a:rPr>
+              <a:t>t</a:t>
+            </a:r>
+            <a:r>
+              <a:rPr b="0" lang="en-US" sz="4400" spc="-1" strike="noStrike">
+                <a:solidFill>
+                  <a:srgbClr val="000000"/>
+                </a:solidFill>
+                <a:latin typeface="Arial"/>
+              </a:rPr>
+              <a:t>o</a:t>
+            </a:r>
+            <a:r>
+              <a:rPr b="0" lang="en-US" sz="4400" spc="-1" strike="noStrike">
+                <a:solidFill>
+                  <a:srgbClr val="000000"/>
+                </a:solidFill>
+                <a:latin typeface="Arial"/>
+              </a:rPr>
+              <a:t> </a:t>
+            </a:r>
+            <a:r>
+              <a:rPr b="0" lang="en-US" sz="4400" spc="-1" strike="noStrike">
+                <a:solidFill>
+                  <a:srgbClr val="000000"/>
+                </a:solidFill>
+                <a:latin typeface="Arial"/>
+              </a:rPr>
+              <a:t>m</a:t>
+            </a:r>
+            <a:r>
+              <a:rPr b="0" lang="en-US" sz="4400" spc="-1" strike="noStrike">
+                <a:solidFill>
+                  <a:srgbClr val="000000"/>
+                </a:solidFill>
+                <a:latin typeface="Arial"/>
+              </a:rPr>
+              <a:t>o</a:t>
+            </a:r>
+            <a:r>
+              <a:rPr b="0" lang="en-US" sz="4400" spc="-1" strike="noStrike">
+                <a:solidFill>
+                  <a:srgbClr val="000000"/>
+                </a:solidFill>
+                <a:latin typeface="Arial"/>
+              </a:rPr>
+              <a:t>v</a:t>
+            </a:r>
+            <a:r>
+              <a:rPr b="0" lang="en-US" sz="4400" spc="-1" strike="noStrike">
+                <a:solidFill>
+                  <a:srgbClr val="000000"/>
+                </a:solidFill>
+                <a:latin typeface="Arial"/>
+              </a:rPr>
+              <a:t>e</a:t>
+            </a:r>
+            <a:r>
+              <a:rPr b="0" lang="en-US" sz="4400" spc="-1" strike="noStrike">
+                <a:solidFill>
+                  <a:srgbClr val="000000"/>
+                </a:solidFill>
+                <a:latin typeface="Arial"/>
+              </a:rPr>
+              <a:t> </a:t>
+            </a:r>
+            <a:r>
+              <a:rPr b="0" lang="en-US" sz="4400" spc="-1" strike="noStrike">
+                <a:solidFill>
+                  <a:srgbClr val="000000"/>
+                </a:solidFill>
+                <a:latin typeface="Arial"/>
+              </a:rPr>
+              <a:t>t</a:t>
+            </a:r>
+            <a:r>
+              <a:rPr b="0" lang="en-US" sz="4400" spc="-1" strike="noStrike">
+                <a:solidFill>
+                  <a:srgbClr val="000000"/>
+                </a:solidFill>
+                <a:latin typeface="Arial"/>
+              </a:rPr>
+              <a:t>h</a:t>
+            </a:r>
+            <a:r>
+              <a:rPr b="0" lang="en-US" sz="4400" spc="-1" strike="noStrike">
+                <a:solidFill>
+                  <a:srgbClr val="000000"/>
+                </a:solidFill>
+                <a:latin typeface="Arial"/>
+              </a:rPr>
+              <a:t>e</a:t>
+            </a:r>
+            <a:r>
+              <a:rPr b="0" lang="en-US" sz="4400" spc="-1" strike="noStrike">
+                <a:solidFill>
+                  <a:srgbClr val="000000"/>
+                </a:solidFill>
+                <a:latin typeface="Arial"/>
+              </a:rPr>
+              <a:t> </a:t>
+            </a:r>
+            <a:r>
+              <a:rPr b="0" lang="en-US" sz="4400" spc="-1" strike="noStrike">
+                <a:solidFill>
+                  <a:srgbClr val="000000"/>
+                </a:solidFill>
+                <a:latin typeface="Arial"/>
+              </a:rPr>
+              <a:t>s</a:t>
+            </a:r>
+            <a:r>
+              <a:rPr b="0" lang="en-US" sz="4400" spc="-1" strike="noStrike">
+                <a:solidFill>
+                  <a:srgbClr val="000000"/>
+                </a:solidFill>
+                <a:latin typeface="Arial"/>
+              </a:rPr>
+              <a:t>li</a:t>
+            </a:r>
+            <a:r>
+              <a:rPr b="0" lang="en-US" sz="4400" spc="-1" strike="noStrike">
+                <a:solidFill>
+                  <a:srgbClr val="000000"/>
+                </a:solidFill>
+                <a:latin typeface="Arial"/>
+              </a:rPr>
+              <a:t>d</a:t>
+            </a:r>
+            <a:r>
+              <a:rPr b="0" lang="en-US" sz="4400" spc="-1" strike="noStrike">
+                <a:solidFill>
+                  <a:srgbClr val="000000"/>
+                </a:solidFill>
+                <a:latin typeface="Arial"/>
+              </a:rPr>
+              <a:t>e</a:t>
+            </a:r>
+            <a:endParaRPr b="0" lang="en-US" sz="4400" spc="-1" strike="noStrike">
+              <a:solidFill>
+                <a:srgbClr val="000000"/>
+              </a:solidFill>
+              <a:latin typeface="Arial"/>
             </a:endParaRPr>
           </a:p>
         </p:txBody>
@@ -125,7 +297,25 @@
                 </a:solidFill>
                 <a:latin typeface="Arial"/>
               </a:rPr>
-              <a:t>Click to edit the notes format</a:t>
+              <a:t>Click to edit </a:t>
+            </a:r>
+            <a:r>
+              <a:rPr b="0" lang="en-US" sz="2000" spc="-1" strike="noStrike">
+                <a:solidFill>
+                  <a:srgbClr val="000000"/>
+                </a:solidFill>
+                <a:latin typeface="Arial"/>
+              </a:rPr>
+              <a:t>the notes </a:t>
+            </a:r>
+            <a:r>
+              <a:rPr b="0" lang="en-US" sz="2000" spc="-1" strike="noStrike">
+                <a:solidFill>
+                  <a:srgbClr val="000000"/>
+                </a:solidFill>
+                <a:latin typeface="Arial"/>
+              </a:rPr>
+              <a:t>format</a:t>
             </a:r>
             <a:endParaRPr b="0" lang="en-US" sz="2000" spc="-1" strike="noStrike">
               <a:solidFill>
@@ -347,7 +537,7 @@
             <a:pPr indent="0" algn="r">
               <a:buNone/>
             </a:pPr>
-            <a:fld id="{3D4EF0E3-2F98-4236-8820-5043A363933B}" type="slidenum">
+            <a:fld id="{C1CE0C00-C61A-410B-A315-51422E03165C}" type="slidenum">
               <a:rPr b="0" lang="en-US" sz="1400" spc="-1" strike="noStrike">
                 <a:solidFill>
                   <a:srgbClr val="000000"/>
@@ -401,7 +591,7 @@
         <p:spPr>
           <a:xfrm>
             <a:off x="685800" y="1143000"/>
-            <a:ext cx="5486040" cy="3085920"/>
+            <a:ext cx="5485680" cy="3085560"/>
           </a:xfrm>
           <a:prstGeom prst="rect">
             <a:avLst/>
@@ -424,7 +614,7 @@
         <p:spPr>
           <a:xfrm>
             <a:off x="685800" y="4400640"/>
-            <a:ext cx="5486040" cy="3600000"/>
+            <a:ext cx="5485680" cy="3599640"/>
           </a:xfrm>
           <a:prstGeom prst="rect">
             <a:avLst/>
@@ -464,7 +654,7 @@
         <p:spPr>
           <a:xfrm>
             <a:off x="3884760" y="8685360"/>
-            <a:ext cx="2971440" cy="458280"/>
+            <a:ext cx="2971080" cy="457920"/>
           </a:xfrm>
           <a:prstGeom prst="rect">
             <a:avLst/>
@@ -484,6 +674,9 @@
                 <a:spcPct val="100000"/>
               </a:lnSpc>
               <a:buNone/>
+              <a:tabLst>
+                <a:tab algn="l" pos="0"/>
+              </a:tabLst>
               <a:defRPr b="0" lang="en-US" sz="1200" spc="-1" strike="noStrike">
                 <a:solidFill>
                   <a:schemeClr val="dk1"/>
@@ -499,8 +692,11 @@
                 <a:spcPct val="100000"/>
               </a:lnSpc>
               <a:buNone/>
-            </a:pPr>
-            <a:fld id="{9E04084E-91AC-46FB-8B4C-B0AB4B283949}" type="slidenum">
+              <a:tabLst>
+                <a:tab algn="l" pos="0"/>
+              </a:tabLst>
+            </a:pPr>
+            <a:fld id="{46237059-AB03-452C-B8FF-86779469E6BA}" type="slidenum">
               <a:rPr b="0" lang="en-US" sz="1200" spc="-1" strike="noStrike">
                 <a:solidFill>
                   <a:schemeClr val="dk1"/>
@@ -554,7 +750,7 @@
         <p:spPr>
           <a:xfrm>
             <a:off x="685800" y="1143000"/>
-            <a:ext cx="5486040" cy="3085920"/>
+            <a:ext cx="5485680" cy="3085560"/>
           </a:xfrm>
           <a:prstGeom prst="rect">
             <a:avLst/>
@@ -577,7 +773,7 @@
         <p:spPr>
           <a:xfrm>
             <a:off x="685800" y="4400640"/>
-            <a:ext cx="5486040" cy="3600000"/>
+            <a:ext cx="5485680" cy="3599640"/>
           </a:xfrm>
           <a:prstGeom prst="rect">
             <a:avLst/>
@@ -617,7 +813,7 @@
         <p:spPr>
           <a:xfrm>
             <a:off x="3884760" y="8685360"/>
-            <a:ext cx="2971440" cy="458280"/>
+            <a:ext cx="2971080" cy="457920"/>
           </a:xfrm>
           <a:prstGeom prst="rect">
             <a:avLst/>
@@ -637,6 +833,9 @@
                 <a:spcPct val="100000"/>
               </a:lnSpc>
               <a:buNone/>
+              <a:tabLst>
+                <a:tab algn="l" pos="0"/>
+              </a:tabLst>
               <a:defRPr b="0" lang="en-US" sz="1200" spc="-1" strike="noStrike">
                 <a:solidFill>
                   <a:schemeClr val="dk1"/>
@@ -652,8 +851,11 @@
                 <a:spcPct val="100000"/>
               </a:lnSpc>
               <a:buNone/>
-            </a:pPr>
-            <a:fld id="{08FC6A78-D551-4AA4-94F2-4D27C04B6F2D}" type="slidenum">
+              <a:tabLst>
+                <a:tab algn="l" pos="0"/>
+              </a:tabLst>
+            </a:pPr>
+            <a:fld id="{6146F3FD-7410-4E2A-BFC9-B4611889BF14}" type="slidenum">
               <a:rPr b="0" lang="en-US" sz="1200" spc="-1" strike="noStrike">
                 <a:solidFill>
                   <a:schemeClr val="dk1"/>
@@ -707,7 +909,7 @@
         <p:spPr>
           <a:xfrm>
             <a:off x="685800" y="1143000"/>
-            <a:ext cx="5486040" cy="3085920"/>
+            <a:ext cx="5485680" cy="3085560"/>
           </a:xfrm>
           <a:prstGeom prst="rect">
             <a:avLst/>
@@ -730,7 +932,7 @@
         <p:spPr>
           <a:xfrm>
             <a:off x="685800" y="4400640"/>
-            <a:ext cx="5486040" cy="3600000"/>
+            <a:ext cx="5485680" cy="3599640"/>
           </a:xfrm>
           <a:prstGeom prst="rect">
             <a:avLst/>
@@ -770,7 +972,7 @@
         <p:spPr>
           <a:xfrm>
             <a:off x="3884760" y="8685360"/>
-            <a:ext cx="2971440" cy="458280"/>
+            <a:ext cx="2971080" cy="457920"/>
           </a:xfrm>
           <a:prstGeom prst="rect">
             <a:avLst/>
@@ -790,6 +992,9 @@
                 <a:spcPct val="100000"/>
               </a:lnSpc>
               <a:buNone/>
+              <a:tabLst>
+                <a:tab algn="l" pos="0"/>
+              </a:tabLst>
               <a:defRPr b="0" lang="en-US" sz="1200" spc="-1" strike="noStrike">
                 <a:solidFill>
                   <a:schemeClr val="dk1"/>
@@ -805,8 +1010,11 @@
                 <a:spcPct val="100000"/>
               </a:lnSpc>
               <a:buNone/>
-            </a:pPr>
-            <a:fld id="{64711564-9C1C-4F0B-9625-DF1BB383EABD}" type="slidenum">
+              <a:tabLst>
+                <a:tab algn="l" pos="0"/>
+              </a:tabLst>
+            </a:pPr>
+            <a:fld id="{45153246-EDDF-408E-8B55-D7FD910DA2F6}" type="slidenum">
               <a:rPr b="0" lang="en-US" sz="1200" spc="-1" strike="noStrike">
                 <a:solidFill>
                   <a:schemeClr val="dk1"/>
@@ -860,7 +1068,7 @@
         <p:spPr>
           <a:xfrm>
             <a:off x="685800" y="1143000"/>
-            <a:ext cx="5486040" cy="3085920"/>
+            <a:ext cx="5485680" cy="3085560"/>
           </a:xfrm>
           <a:prstGeom prst="rect">
             <a:avLst/>
@@ -883,7 +1091,7 @@
         <p:spPr>
           <a:xfrm>
             <a:off x="685800" y="4400640"/>
-            <a:ext cx="5486040" cy="3600000"/>
+            <a:ext cx="5485680" cy="3599640"/>
           </a:xfrm>
           <a:prstGeom prst="rect">
             <a:avLst/>
@@ -923,7 +1131,7 @@
         <p:spPr>
           <a:xfrm>
             <a:off x="3884760" y="8685360"/>
-            <a:ext cx="2971440" cy="458280"/>
+            <a:ext cx="2971080" cy="457920"/>
           </a:xfrm>
           <a:prstGeom prst="rect">
             <a:avLst/>
@@ -943,6 +1151,9 @@
                 <a:spcPct val="100000"/>
               </a:lnSpc>
               <a:buNone/>
+              <a:tabLst>
+                <a:tab algn="l" pos="0"/>
+              </a:tabLst>
               <a:defRPr b="0" lang="en-US" sz="1200" spc="-1" strike="noStrike">
                 <a:solidFill>
                   <a:schemeClr val="dk1"/>
@@ -958,8 +1169,11 @@
                 <a:spcPct val="100000"/>
               </a:lnSpc>
               <a:buNone/>
-            </a:pPr>
-            <a:fld id="{9057D041-3732-47D3-B077-7377FD13F97F}" type="slidenum">
+              <a:tabLst>
+                <a:tab algn="l" pos="0"/>
+              </a:tabLst>
+            </a:pPr>
+            <a:fld id="{AE57CAD2-1E3E-43D3-BF7E-A3B3855A663C}" type="slidenum">
               <a:rPr b="0" lang="en-US" sz="1200" spc="-1" strike="noStrike">
                 <a:solidFill>
                   <a:schemeClr val="dk1"/>
@@ -1013,7 +1227,7 @@
         <p:spPr>
           <a:xfrm>
             <a:off x="685800" y="1143000"/>
-            <a:ext cx="5486040" cy="3085920"/>
+            <a:ext cx="5485680" cy="3085560"/>
           </a:xfrm>
           <a:prstGeom prst="rect">
             <a:avLst/>
@@ -1036,7 +1250,7 @@
         <p:spPr>
           <a:xfrm>
             <a:off x="685800" y="4400640"/>
-            <a:ext cx="5486040" cy="3600000"/>
+            <a:ext cx="5485680" cy="3599640"/>
           </a:xfrm>
           <a:prstGeom prst="rect">
             <a:avLst/>
@@ -1076,7 +1290,7 @@
         <p:spPr>
           <a:xfrm>
             <a:off x="3884760" y="8685360"/>
-            <a:ext cx="2971440" cy="458280"/>
+            <a:ext cx="2971080" cy="457920"/>
           </a:xfrm>
           <a:prstGeom prst="rect">
             <a:avLst/>
@@ -1096,6 +1310,9 @@
                 <a:spcPct val="100000"/>
               </a:lnSpc>
               <a:buNone/>
+              <a:tabLst>
+                <a:tab algn="l" pos="0"/>
+              </a:tabLst>
               <a:defRPr b="0" lang="en-US" sz="1200" spc="-1" strike="noStrike">
                 <a:solidFill>
                   <a:schemeClr val="dk1"/>
@@ -1111,8 +1328,11 @@
                 <a:spcPct val="100000"/>
               </a:lnSpc>
               <a:buNone/>
-            </a:pPr>
-            <a:fld id="{B2ABD74B-6E9A-4260-9BCF-9DC30130C696}" type="slidenum">
+              <a:tabLst>
+                <a:tab algn="l" pos="0"/>
+              </a:tabLst>
+            </a:pPr>
+            <a:fld id="{AD7B1CCF-FEC3-4E76-8CF2-7C082D79366B}" type="slidenum">
               <a:rPr b="0" lang="en-US" sz="1200" spc="-1" strike="noStrike">
                 <a:solidFill>
                   <a:schemeClr val="dk1"/>
@@ -1166,7 +1386,7 @@
         <p:spPr>
           <a:xfrm>
             <a:off x="685800" y="1143000"/>
-            <a:ext cx="5486040" cy="3085920"/>
+            <a:ext cx="5485680" cy="3085560"/>
           </a:xfrm>
           <a:prstGeom prst="rect">
             <a:avLst/>
@@ -1189,7 +1409,7 @@
         <p:spPr>
           <a:xfrm>
             <a:off x="685800" y="4400640"/>
-            <a:ext cx="5486040" cy="3600000"/>
+            <a:ext cx="5485680" cy="3599640"/>
           </a:xfrm>
           <a:prstGeom prst="rect">
             <a:avLst/>
@@ -1229,7 +1449,7 @@
         <p:spPr>
           <a:xfrm>
             <a:off x="3884760" y="8685360"/>
-            <a:ext cx="2971440" cy="458280"/>
+            <a:ext cx="2971080" cy="457920"/>
           </a:xfrm>
           <a:prstGeom prst="rect">
             <a:avLst/>
@@ -1249,6 +1469,9 @@
                 <a:spcPct val="100000"/>
               </a:lnSpc>
               <a:buNone/>
+              <a:tabLst>
+                <a:tab algn="l" pos="0"/>
+              </a:tabLst>
               <a:defRPr b="0" lang="en-US" sz="1200" spc="-1" strike="noStrike">
                 <a:solidFill>
                   <a:schemeClr val="dk1"/>
@@ -1264,8 +1487,11 @@
                 <a:spcPct val="100000"/>
               </a:lnSpc>
               <a:buNone/>
-            </a:pPr>
-            <a:fld id="{DE2A155E-A7CF-4D82-B519-6751927D3FBA}" type="slidenum">
+              <a:tabLst>
+                <a:tab algn="l" pos="0"/>
+              </a:tabLst>
+            </a:pPr>
+            <a:fld id="{53533AB2-370B-47A9-ADDD-AC2796A40366}" type="slidenum">
               <a:rPr b="0" lang="en-US" sz="1200" spc="-1" strike="noStrike">
                 <a:solidFill>
                   <a:schemeClr val="dk1"/>
@@ -1319,7 +1545,7 @@
         <p:spPr>
           <a:xfrm>
             <a:off x="685800" y="1143000"/>
-            <a:ext cx="5486040" cy="3085920"/>
+            <a:ext cx="5485680" cy="3085560"/>
           </a:xfrm>
           <a:prstGeom prst="rect">
             <a:avLst/>
@@ -1342,7 +1568,7 @@
         <p:spPr>
           <a:xfrm>
             <a:off x="685800" y="4400640"/>
-            <a:ext cx="5486040" cy="3600000"/>
+            <a:ext cx="5485680" cy="3599640"/>
           </a:xfrm>
           <a:prstGeom prst="rect">
             <a:avLst/>
@@ -1382,7 +1608,7 @@
         <p:spPr>
           <a:xfrm>
             <a:off x="3884760" y="8685360"/>
-            <a:ext cx="2971440" cy="458280"/>
+            <a:ext cx="2971080" cy="457920"/>
           </a:xfrm>
           <a:prstGeom prst="rect">
             <a:avLst/>
@@ -1402,6 +1628,9 @@
                 <a:spcPct val="100000"/>
               </a:lnSpc>
               <a:buNone/>
+              <a:tabLst>
+                <a:tab algn="l" pos="0"/>
+              </a:tabLst>
               <a:defRPr b="0" lang="en-US" sz="1200" spc="-1" strike="noStrike">
                 <a:solidFill>
                   <a:schemeClr val="dk1"/>
@@ -1417,8 +1646,11 @@
                 <a:spcPct val="100000"/>
               </a:lnSpc>
               <a:buNone/>
-            </a:pPr>
-            <a:fld id="{01D1ECCF-2B01-4751-840E-9213D6F5BA6E}" type="slidenum">
+              <a:tabLst>
+                <a:tab algn="l" pos="0"/>
+              </a:tabLst>
+            </a:pPr>
+            <a:fld id="{90C6EC25-03E8-45DB-89A4-5D7DD19021C3}" type="slidenum">
               <a:rPr b="0" lang="en-US" sz="1200" spc="-1" strike="noStrike">
                 <a:solidFill>
                   <a:schemeClr val="dk1"/>
@@ -1472,7 +1704,7 @@
         <p:spPr>
           <a:xfrm>
             <a:off x="685800" y="1143000"/>
-            <a:ext cx="5486040" cy="3085920"/>
+            <a:ext cx="5485680" cy="3085560"/>
           </a:xfrm>
           <a:prstGeom prst="rect">
             <a:avLst/>
@@ -1495,7 +1727,7 @@
         <p:spPr>
           <a:xfrm>
             <a:off x="685800" y="4400640"/>
-            <a:ext cx="5486040" cy="3600000"/>
+            <a:ext cx="5485680" cy="3599640"/>
           </a:xfrm>
           <a:prstGeom prst="rect">
             <a:avLst/>
@@ -1535,7 +1767,7 @@
         <p:spPr>
           <a:xfrm>
             <a:off x="3884760" y="8685360"/>
-            <a:ext cx="2971440" cy="458280"/>
+            <a:ext cx="2971080" cy="457920"/>
           </a:xfrm>
           <a:prstGeom prst="rect">
             <a:avLst/>
@@ -1555,6 +1787,9 @@
                 <a:spcPct val="100000"/>
               </a:lnSpc>
               <a:buNone/>
+              <a:tabLst>
+                <a:tab algn="l" pos="0"/>
+              </a:tabLst>
               <a:defRPr b="0" lang="en-US" sz="1200" spc="-1" strike="noStrike">
                 <a:solidFill>
                   <a:schemeClr val="dk1"/>
@@ -1570,8 +1805,11 @@
                 <a:spcPct val="100000"/>
               </a:lnSpc>
               <a:buNone/>
-            </a:pPr>
-            <a:fld id="{E3D7AFE3-43DB-47B2-8DBE-3A6175E59E36}" type="slidenum">
+              <a:tabLst>
+                <a:tab algn="l" pos="0"/>
+              </a:tabLst>
+            </a:pPr>
+            <a:fld id="{F69C34D1-C046-4060-AD2F-202315C0879D}" type="slidenum">
               <a:rPr b="0" lang="en-US" sz="1200" spc="-1" strike="noStrike">
                 <a:solidFill>
                   <a:schemeClr val="dk1"/>
@@ -1625,7 +1863,7 @@
         <p:spPr>
           <a:xfrm>
             <a:off x="685800" y="1143000"/>
-            <a:ext cx="5486040" cy="3085920"/>
+            <a:ext cx="5485680" cy="3085560"/>
           </a:xfrm>
           <a:prstGeom prst="rect">
             <a:avLst/>
@@ -1648,7 +1886,7 @@
         <p:spPr>
           <a:xfrm>
             <a:off x="685800" y="4400640"/>
-            <a:ext cx="5486040" cy="3600000"/>
+            <a:ext cx="5485680" cy="3599640"/>
           </a:xfrm>
           <a:prstGeom prst="rect">
             <a:avLst/>
@@ -1688,7 +1926,7 @@
         <p:spPr>
           <a:xfrm>
             <a:off x="3884760" y="8685360"/>
-            <a:ext cx="2971440" cy="458280"/>
+            <a:ext cx="2971080" cy="457920"/>
           </a:xfrm>
           <a:prstGeom prst="rect">
             <a:avLst/>
@@ -1708,6 +1946,9 @@
                 <a:spcPct val="100000"/>
               </a:lnSpc>
               <a:buNone/>
+              <a:tabLst>
+                <a:tab algn="l" pos="0"/>
+              </a:tabLst>
               <a:defRPr b="0" lang="en-US" sz="1200" spc="-1" strike="noStrike">
                 <a:solidFill>
                   <a:schemeClr val="dk1"/>
@@ -1723,8 +1964,11 @@
                 <a:spcPct val="100000"/>
               </a:lnSpc>
               <a:buNone/>
-            </a:pPr>
-            <a:fld id="{22661A87-6D39-4BCF-9652-0C829F3CEC0B}" type="slidenum">
+              <a:tabLst>
+                <a:tab algn="l" pos="0"/>
+              </a:tabLst>
+            </a:pPr>
+            <a:fld id="{5F04BDE9-7176-44D2-9B9E-686F530CAB7B}" type="slidenum">
               <a:rPr b="0" lang="en-US" sz="1200" spc="-1" strike="noStrike">
                 <a:solidFill>
                   <a:schemeClr val="dk1"/>
@@ -1778,7 +2022,7 @@
         <p:spPr>
           <a:xfrm>
             <a:off x="685800" y="1143000"/>
-            <a:ext cx="5486040" cy="3085920"/>
+            <a:ext cx="5485680" cy="3085560"/>
           </a:xfrm>
           <a:prstGeom prst="rect">
             <a:avLst/>
@@ -1801,7 +2045,7 @@
         <p:spPr>
           <a:xfrm>
             <a:off x="685800" y="4400640"/>
-            <a:ext cx="5486040" cy="3600000"/>
+            <a:ext cx="5485680" cy="3599640"/>
           </a:xfrm>
           <a:prstGeom prst="rect">
             <a:avLst/>
@@ -1841,7 +2085,7 @@
         <p:spPr>
           <a:xfrm>
             <a:off x="3884760" y="8685360"/>
-            <a:ext cx="2971440" cy="458280"/>
+            <a:ext cx="2971080" cy="457920"/>
           </a:xfrm>
           <a:prstGeom prst="rect">
             <a:avLst/>
@@ -1861,6 +2105,9 @@
                 <a:spcPct val="100000"/>
               </a:lnSpc>
               <a:buNone/>
+              <a:tabLst>
+                <a:tab algn="l" pos="0"/>
+              </a:tabLst>
               <a:defRPr b="0" lang="en-US" sz="1200" spc="-1" strike="noStrike">
                 <a:solidFill>
                   <a:schemeClr val="dk1"/>
@@ -1876,8 +2123,11 @@
                 <a:spcPct val="100000"/>
               </a:lnSpc>
               <a:buNone/>
-            </a:pPr>
-            <a:fld id="{A4985FCA-FD16-4B67-AE74-ADB1A4BDB180}" type="slidenum">
+              <a:tabLst>
+                <a:tab algn="l" pos="0"/>
+              </a:tabLst>
+            </a:pPr>
+            <a:fld id="{F7B1833B-ED66-4CE7-AB5B-CD20AA4F2C48}" type="slidenum">
               <a:rPr b="0" lang="en-US" sz="1200" spc="-1" strike="noStrike">
                 <a:solidFill>
                   <a:schemeClr val="dk1"/>
@@ -1975,23 +2225,86 @@
             <a:noAutofit/>
           </a:bodyPr>
           <a:p>
-            <a:pPr indent="0">
+            <a:pPr indent="0" algn="ctr">
               <a:buNone/>
             </a:pPr>
             <a:r>
-              <a:rPr b="0" lang="en-US" sz="1800" spc="-1" strike="noStrike">
-                <a:solidFill>
-                  <a:schemeClr val="dk1"/>
-                </a:solidFill>
-                <a:latin typeface="Calibri"/>
-              </a:rPr>
-              <a:t>Click to edit the title text format</a:t>
-            </a:r>
-            <a:endParaRPr b="0" lang="en-US" sz="1800" spc="-1" strike="noStrike">
-              <a:solidFill>
-                <a:schemeClr val="dk1"/>
-              </a:solidFill>
-              <a:latin typeface="Calibri"/>
+              <a:rPr b="0" lang="en-US" sz="4400" spc="-1" strike="noStrike">
+                <a:solidFill>
+                  <a:srgbClr val="000000"/>
+                </a:solidFill>
+                <a:latin typeface="Arial"/>
+              </a:rPr>
+              <a:t>Click </a:t>
+            </a:r>
+            <a:r>
+              <a:rPr b="0" lang="en-US" sz="4400" spc="-1" strike="noStrike">
+                <a:solidFill>
+                  <a:srgbClr val="000000"/>
+                </a:solidFill>
+                <a:latin typeface="Arial"/>
+              </a:rPr>
+              <a:t>to </a:t>
+            </a:r>
+            <a:r>
+              <a:rPr b="0" lang="en-US" sz="4400" spc="-1" strike="noStrike">
+                <a:solidFill>
+                  <a:srgbClr val="000000"/>
+                </a:solidFill>
+                <a:latin typeface="Arial"/>
+              </a:rPr>
+              <a:t>edit </a:t>
+            </a:r>
+            <a:r>
+              <a:rPr b="0" lang="en-US" sz="4400" spc="-1" strike="noStrike">
+                <a:solidFill>
+                  <a:srgbClr val="000000"/>
+                </a:solidFill>
+                <a:latin typeface="Arial"/>
+              </a:rPr>
+              <a:t>the </a:t>
+            </a:r>
+            <a:r>
+              <a:rPr b="0" lang="en-US" sz="4400" spc="-1" strike="noStrike">
+                <a:solidFill>
+                  <a:srgbClr val="000000"/>
+                </a:solidFill>
+                <a:latin typeface="Arial"/>
+              </a:rPr>
+              <a:t>title </a:t>
+            </a:r>
+            <a:r>
+              <a:rPr b="0" lang="en-US" sz="4400" spc="-1" strike="noStrike">
+                <a:solidFill>
+                  <a:srgbClr val="000000"/>
+                </a:solidFill>
+                <a:latin typeface="Arial"/>
+              </a:rPr>
+              <a:t>text </a:t>
+            </a:r>
+            <a:r>
+              <a:rPr b="0" lang="en-US" sz="4400" spc="-1" strike="noStrike">
+                <a:solidFill>
+                  <a:srgbClr val="000000"/>
+                </a:solidFill>
+                <a:latin typeface="Arial"/>
+              </a:rPr>
+              <a:t>form</a:t>
+            </a:r>
+            <a:r>
+              <a:rPr b="0" lang="en-US" sz="4400" spc="-1" strike="noStrike">
+                <a:solidFill>
+                  <a:srgbClr val="000000"/>
+                </a:solidFill>
+                <a:latin typeface="Arial"/>
+              </a:rPr>
+              <a:t>at</a:t>
+            </a:r>
+            <a:endParaRPr b="0" lang="en-US" sz="4400" spc="-1" strike="noStrike">
+              <a:solidFill>
+                <a:srgbClr val="000000"/>
+              </a:solidFill>
+              <a:latin typeface="Arial"/>
             </a:endParaRPr>
           </a:p>
         </p:txBody>
@@ -2021,7 +2334,7 @@
         </p:spPr>
         <p:txBody>
           <a:bodyPr lIns="0" rIns="0" tIns="0" bIns="0" anchor="t">
-            <a:normAutofit fontScale="95303"/>
+            <a:normAutofit/>
           </a:bodyPr>
           <a:p>
             <a:pPr marL="432000" indent="-324000">
@@ -2038,17 +2351,17 @@
             <a:r>
               <a:rPr b="0" lang="en-US" sz="3200" spc="-1" strike="noStrike">
                 <a:solidFill>
-                  <a:schemeClr val="dk1"/>
-                </a:solidFill>
-                <a:latin typeface="Calibri"/>
+                  <a:srgbClr val="000000"/>
+                </a:solidFill>
+                <a:latin typeface="Arial"/>
               </a:rPr>
               <a:t>Click to edit the outline text format</a:t>
             </a:r>
             <a:endParaRPr b="0" lang="en-US" sz="3200" spc="-1" strike="noStrike">
               <a:solidFill>
-                <a:schemeClr val="dk1"/>
-              </a:solidFill>
-              <a:latin typeface="Calibri"/>
+                <a:srgbClr val="000000"/>
+              </a:solidFill>
+              <a:latin typeface="Arial"/>
             </a:endParaRPr>
           </a:p>
           <a:p>
@@ -2064,19 +2377,19 @@
               <a:buChar char=""/>
             </a:pPr>
             <a:r>
-              <a:rPr b="0" lang="en-US" sz="2400" spc="-1" strike="noStrike">
-                <a:solidFill>
-                  <a:schemeClr val="dk1"/>
-                </a:solidFill>
-                <a:latin typeface="Calibri"/>
+              <a:rPr b="0" lang="en-US" sz="2800" spc="-1" strike="noStrike">
+                <a:solidFill>
+                  <a:srgbClr val="000000"/>
+                </a:solidFill>
+                <a:latin typeface="Arial"/>
               </a:rPr>
               <a:t>Second Outline Level</a:t>
             </a:r>
-            <a:endParaRPr b="0" lang="en-US" sz="2400" spc="-1" strike="noStrike">
-              <a:solidFill>
-                <a:schemeClr val="dk1"/>
-              </a:solidFill>
-              <a:latin typeface="Calibri"/>
+            <a:endParaRPr b="0" lang="en-US" sz="2800" spc="-1" strike="noStrike">
+              <a:solidFill>
+                <a:srgbClr val="000000"/>
+              </a:solidFill>
+              <a:latin typeface="Arial"/>
             </a:endParaRPr>
           </a:p>
           <a:p>
@@ -2092,19 +2405,19 @@
               <a:buChar char=""/>
             </a:pPr>
             <a:r>
-              <a:rPr b="0" lang="en-US" sz="2000" spc="-1" strike="noStrike">
-                <a:solidFill>
-                  <a:schemeClr val="dk1"/>
-                </a:solidFill>
-                <a:latin typeface="Calibri"/>
+              <a:rPr b="0" lang="en-US" sz="2400" spc="-1" strike="noStrike">
+                <a:solidFill>
+                  <a:srgbClr val="000000"/>
+                </a:solidFill>
+                <a:latin typeface="Arial"/>
               </a:rPr>
               <a:t>Third Outline Level</a:t>
             </a:r>
-            <a:endParaRPr b="0" lang="en-US" sz="2000" spc="-1" strike="noStrike">
-              <a:solidFill>
-                <a:schemeClr val="dk1"/>
-              </a:solidFill>
-              <a:latin typeface="Calibri"/>
+            <a:endParaRPr b="0" lang="en-US" sz="2400" spc="-1" strike="noStrike">
+              <a:solidFill>
+                <a:srgbClr val="000000"/>
+              </a:solidFill>
+              <a:latin typeface="Arial"/>
             </a:endParaRPr>
           </a:p>
           <a:p>
@@ -2122,17 +2435,17 @@
             <a:r>
               <a:rPr b="0" lang="en-US" sz="2000" spc="-1" strike="noStrike">
                 <a:solidFill>
-                  <a:schemeClr val="dk1"/>
-                </a:solidFill>
-                <a:latin typeface="Calibri"/>
+                  <a:srgbClr val="000000"/>
+                </a:solidFill>
+                <a:latin typeface="Arial"/>
               </a:rPr>
               <a:t>Fourth Outline Level</a:t>
             </a:r>
             <a:endParaRPr b="0" lang="en-US" sz="2000" spc="-1" strike="noStrike">
               <a:solidFill>
-                <a:schemeClr val="dk1"/>
-              </a:solidFill>
-              <a:latin typeface="Calibri"/>
+                <a:srgbClr val="000000"/>
+              </a:solidFill>
+              <a:latin typeface="Arial"/>
             </a:endParaRPr>
           </a:p>
           <a:p>
@@ -2150,17 +2463,17 @@
             <a:r>
               <a:rPr b="0" lang="en-US" sz="2000" spc="-1" strike="noStrike">
                 <a:solidFill>
-                  <a:schemeClr val="dk1"/>
-                </a:solidFill>
-                <a:latin typeface="Calibri"/>
+                  <a:srgbClr val="000000"/>
+                </a:solidFill>
+                <a:latin typeface="Arial"/>
               </a:rPr>
               <a:t>Fifth Outline Level</a:t>
             </a:r>
             <a:endParaRPr b="0" lang="en-US" sz="2000" spc="-1" strike="noStrike">
               <a:solidFill>
-                <a:schemeClr val="dk1"/>
-              </a:solidFill>
-              <a:latin typeface="Calibri"/>
+                <a:srgbClr val="000000"/>
+              </a:solidFill>
+              <a:latin typeface="Arial"/>
             </a:endParaRPr>
           </a:p>
           <a:p>
@@ -2178,17 +2491,17 @@
             <a:r>
               <a:rPr b="0" lang="en-US" sz="2000" spc="-1" strike="noStrike">
                 <a:solidFill>
-                  <a:schemeClr val="dk1"/>
-                </a:solidFill>
-                <a:latin typeface="Calibri"/>
+                  <a:srgbClr val="000000"/>
+                </a:solidFill>
+                <a:latin typeface="Arial"/>
               </a:rPr>
               <a:t>Sixth Outline Level</a:t>
             </a:r>
             <a:endParaRPr b="0" lang="en-US" sz="2000" spc="-1" strike="noStrike">
               <a:solidFill>
-                <a:schemeClr val="dk1"/>
-              </a:solidFill>
-              <a:latin typeface="Calibri"/>
+                <a:srgbClr val="000000"/>
+              </a:solidFill>
+              <a:latin typeface="Arial"/>
             </a:endParaRPr>
           </a:p>
           <a:p>
@@ -2206,17 +2519,17 @@
             <a:r>
               <a:rPr b="0" lang="en-US" sz="2000" spc="-1" strike="noStrike">
                 <a:solidFill>
-                  <a:schemeClr val="dk1"/>
-                </a:solidFill>
-                <a:latin typeface="Calibri"/>
+                  <a:srgbClr val="000000"/>
+                </a:solidFill>
+                <a:latin typeface="Arial"/>
               </a:rPr>
               <a:t>Seventh Outline Level</a:t>
             </a:r>
             <a:endParaRPr b="0" lang="en-US" sz="2000" spc="-1" strike="noStrike">
               <a:solidFill>
-                <a:schemeClr val="dk1"/>
-              </a:solidFill>
-              <a:latin typeface="Calibri"/>
+                <a:srgbClr val="000000"/>
+              </a:solidFill>
+              <a:latin typeface="Arial"/>
             </a:endParaRPr>
           </a:p>
         </p:txBody>
@@ -2263,7 +2576,7 @@
         <p:spPr>
           <a:xfrm>
             <a:off x="5943600" y="-1463040"/>
-            <a:ext cx="5303160" cy="5303160"/>
+            <a:ext cx="5302800" cy="5302800"/>
           </a:xfrm>
           <a:prstGeom prst="ellipse">
             <a:avLst/>
@@ -2289,6 +2602,11 @@
             <a:noAutofit/>
           </a:bodyPr>
           <a:p>
+            <a:pPr>
+              <a:lnSpc>
+                <a:spcPct val="100000"/>
+              </a:lnSpc>
+            </a:pPr>
             <a:endParaRPr b="0" lang="en-US" sz="1800" spc="-1" strike="noStrike">
               <a:solidFill>
                 <a:srgbClr val="ffffff"/>
@@ -2307,7 +2625,7 @@
         <p:spPr>
           <a:xfrm>
             <a:off x="7315200" y="548640"/>
-            <a:ext cx="2559960" cy="2559960"/>
+            <a:ext cx="2559600" cy="2559600"/>
           </a:xfrm>
           <a:prstGeom prst="ellipse">
             <a:avLst/>
@@ -2337,6 +2655,11 @@
             <a:noAutofit/>
           </a:bodyPr>
           <a:p>
+            <a:pPr>
+              <a:lnSpc>
+                <a:spcPct val="100000"/>
+              </a:lnSpc>
+            </a:pPr>
             <a:endParaRPr b="0" lang="en-US" sz="1800" spc="-1" strike="noStrike">
               <a:solidFill>
                 <a:srgbClr val="ffffff"/>
@@ -2355,7 +2678,7 @@
         <p:spPr>
           <a:xfrm>
             <a:off x="-1371600" y="3200400"/>
-            <a:ext cx="3840120" cy="3840120"/>
+            <a:ext cx="3839760" cy="3839760"/>
           </a:xfrm>
           <a:prstGeom prst="ellipse">
             <a:avLst/>
@@ -2385,6 +2708,11 @@
             <a:noAutofit/>
           </a:bodyPr>
           <a:p>
+            <a:pPr>
+              <a:lnSpc>
+                <a:spcPct val="100000"/>
+              </a:lnSpc>
+            </a:pPr>
             <a:endParaRPr b="0" lang="en-US" sz="1800" spc="-1" strike="noStrike">
               <a:solidFill>
                 <a:srgbClr val="ffffff"/>
@@ -2403,7 +2731,7 @@
         <p:spPr>
           <a:xfrm>
             <a:off x="4572000" y="365760"/>
-            <a:ext cx="319680" cy="319680"/>
+            <a:ext cx="319320" cy="319320"/>
           </a:xfrm>
           <a:prstGeom prst="ellipse">
             <a:avLst/>
@@ -2429,6 +2757,11 @@
             <a:noAutofit/>
           </a:bodyPr>
           <a:p>
+            <a:pPr>
+              <a:lnSpc>
+                <a:spcPct val="100000"/>
+              </a:lnSpc>
+            </a:pPr>
             <a:endParaRPr b="0" lang="en-US" sz="1800" spc="-1" strike="noStrike">
               <a:solidFill>
                 <a:srgbClr val="ffffff"/>
@@ -2447,7 +2780,7 @@
         <p:spPr>
           <a:xfrm>
             <a:off x="5120640" y="868680"/>
-            <a:ext cx="200880" cy="200880"/>
+            <a:ext cx="200520" cy="200520"/>
           </a:xfrm>
           <a:prstGeom prst="ellipse">
             <a:avLst/>
@@ -2473,6 +2806,11 @@
             <a:noAutofit/>
           </a:bodyPr>
           <a:p>
+            <a:pPr>
+              <a:lnSpc>
+                <a:spcPct val="100000"/>
+              </a:lnSpc>
+            </a:pPr>
             <a:endParaRPr b="0" lang="en-US" sz="1800" spc="-1" strike="noStrike">
               <a:solidFill>
                 <a:srgbClr val="000000"/>
@@ -2491,7 +2829,7 @@
         <p:spPr>
           <a:xfrm>
             <a:off x="4114800" y="1005840"/>
-            <a:ext cx="164160" cy="164160"/>
+            <a:ext cx="163800" cy="163800"/>
           </a:xfrm>
           <a:prstGeom prst="ellipse">
             <a:avLst/>
@@ -2517,6 +2855,11 @@
             <a:noAutofit/>
           </a:bodyPr>
           <a:p>
+            <a:pPr>
+              <a:lnSpc>
+                <a:spcPct val="100000"/>
+              </a:lnSpc>
+            </a:pPr>
             <a:endParaRPr b="0" lang="en-US" sz="1800" spc="-1" strike="noStrike">
               <a:solidFill>
                 <a:srgbClr val="000000"/>
@@ -2535,7 +2878,7 @@
         <p:spPr>
           <a:xfrm>
             <a:off x="0" y="0"/>
-            <a:ext cx="200880" cy="5143320"/>
+            <a:ext cx="200520" cy="5142960"/>
           </a:xfrm>
           <a:prstGeom prst="rect">
             <a:avLst/>
@@ -2561,6 +2904,11 @@
             <a:noAutofit/>
           </a:bodyPr>
           <a:p>
+            <a:pPr>
+              <a:lnSpc>
+                <a:spcPct val="100000"/>
+              </a:lnSpc>
+            </a:pPr>
             <a:endParaRPr b="0" lang="en-US" sz="1800" spc="-1" strike="noStrike">
               <a:solidFill>
                 <a:srgbClr val="ffffff"/>
@@ -2579,7 +2927,7 @@
         <p:spPr>
           <a:xfrm>
             <a:off x="457200" y="685800"/>
-            <a:ext cx="2925720" cy="365400"/>
+            <a:ext cx="2925360" cy="365040"/>
           </a:xfrm>
           <a:prstGeom prst="rect">
             <a:avLst/>
@@ -2605,6 +2953,11 @@
             <a:noAutofit/>
           </a:bodyPr>
           <a:p>
+            <a:pPr>
+              <a:lnSpc>
+                <a:spcPct val="100000"/>
+              </a:lnSpc>
+            </a:pPr>
             <a:endParaRPr b="0" lang="en-US" sz="1800" spc="-1" strike="noStrike">
               <a:solidFill>
                 <a:srgbClr val="ffffff"/>
@@ -2623,7 +2976,7 @@
         <p:spPr>
           <a:xfrm>
             <a:off x="457200" y="685800"/>
-            <a:ext cx="2925720" cy="365400"/>
+            <a:ext cx="2925360" cy="365040"/>
           </a:xfrm>
           <a:prstGeom prst="rect">
             <a:avLst/>
@@ -2659,7 +3012,16 @@
                 </a:solidFill>
                 <a:latin typeface="Calibri"/>
               </a:rPr>
-              <a:t>GEEKSFORGEEKS  ·  DATA MINING</a:t>
+              <a:t> </a:t>
+            </a:r>
+            <a:r>
+              <a:rPr b="1" lang="en-US" sz="950" spc="180" strike="noStrike">
+                <a:solidFill>
+                  <a:srgbClr val="ffffff"/>
+                </a:solidFill>
+                <a:latin typeface="Calibri"/>
+              </a:rPr>
+              <a:t>·  DATA MINING</a:t>
             </a:r>
             <a:endParaRPr b="0" lang="en-US" sz="950" spc="-1" strike="noStrike">
               <a:solidFill>
@@ -2679,7 +3041,7 @@
         <p:spPr>
           <a:xfrm>
             <a:off x="457200" y="1207080"/>
-            <a:ext cx="8046360" cy="804240"/>
+            <a:ext cx="8046000" cy="803880"/>
           </a:xfrm>
           <a:prstGeom prst="rect">
             <a:avLst/>
@@ -2736,7 +3098,7 @@
         <p:spPr>
           <a:xfrm>
             <a:off x="457200" y="1965960"/>
-            <a:ext cx="8229240" cy="868320"/>
+            <a:ext cx="8228880" cy="867960"/>
           </a:xfrm>
           <a:prstGeom prst="rect">
             <a:avLst/>
@@ -2793,7 +3155,7 @@
         <p:spPr>
           <a:xfrm>
             <a:off x="457200" y="2907720"/>
-            <a:ext cx="7772040" cy="402120"/>
+            <a:ext cx="7771680" cy="401760"/>
           </a:xfrm>
           <a:prstGeom prst="rect">
             <a:avLst/>
@@ -2850,7 +3212,7 @@
         <p:spPr>
           <a:xfrm>
             <a:off x="457200" y="3493080"/>
-            <a:ext cx="1992960" cy="914040"/>
+            <a:ext cx="1992600" cy="913680"/>
           </a:xfrm>
           <a:prstGeom prst="rect">
             <a:avLst/>
@@ -2876,6 +3238,11 @@
             <a:noAutofit/>
           </a:bodyPr>
           <a:p>
+            <a:pPr>
+              <a:lnSpc>
+                <a:spcPct val="100000"/>
+              </a:lnSpc>
+            </a:pPr>
             <a:endParaRPr b="0" lang="en-US" sz="1800" spc="-1" strike="noStrike">
               <a:solidFill>
                 <a:srgbClr val="ffffff"/>
@@ -2894,7 +3261,7 @@
         <p:spPr>
           <a:xfrm>
             <a:off x="457200" y="3511440"/>
-            <a:ext cx="1992960" cy="475200"/>
+            <a:ext cx="1992600" cy="474840"/>
           </a:xfrm>
           <a:prstGeom prst="rect">
             <a:avLst/>
@@ -2951,7 +3318,7 @@
         <p:spPr>
           <a:xfrm>
             <a:off x="457200" y="3986640"/>
-            <a:ext cx="1992960" cy="383760"/>
+            <a:ext cx="1992600" cy="383400"/>
           </a:xfrm>
           <a:prstGeom prst="rect">
             <a:avLst/>
@@ -3008,7 +3375,7 @@
         <p:spPr>
           <a:xfrm>
             <a:off x="2624400" y="3493080"/>
-            <a:ext cx="1992960" cy="914040"/>
+            <a:ext cx="1992600" cy="913680"/>
           </a:xfrm>
           <a:prstGeom prst="rect">
             <a:avLst/>
@@ -3034,6 +3401,11 @@
             <a:noAutofit/>
           </a:bodyPr>
           <a:p>
+            <a:pPr>
+              <a:lnSpc>
+                <a:spcPct val="100000"/>
+              </a:lnSpc>
+            </a:pPr>
             <a:endParaRPr b="0" lang="en-US" sz="1800" spc="-1" strike="noStrike">
               <a:solidFill>
                 <a:srgbClr val="ffffff"/>
@@ -3052,7 +3424,7 @@
         <p:spPr>
           <a:xfrm>
             <a:off x="2624400" y="3511440"/>
-            <a:ext cx="1992960" cy="475200"/>
+            <a:ext cx="1992600" cy="474840"/>
           </a:xfrm>
           <a:prstGeom prst="rect">
             <a:avLst/>
@@ -3109,7 +3481,7 @@
         <p:spPr>
           <a:xfrm>
             <a:off x="2624400" y="3986640"/>
-            <a:ext cx="1992960" cy="383760"/>
+            <a:ext cx="1992600" cy="383400"/>
           </a:xfrm>
           <a:prstGeom prst="rect">
             <a:avLst/>
@@ -3166,7 +3538,7 @@
         <p:spPr>
           <a:xfrm>
             <a:off x="4791600" y="3493080"/>
-            <a:ext cx="1992960" cy="914040"/>
+            <a:ext cx="1992600" cy="913680"/>
           </a:xfrm>
           <a:prstGeom prst="rect">
             <a:avLst/>
@@ -3192,6 +3564,11 @@
             <a:noAutofit/>
           </a:bodyPr>
           <a:p>
+            <a:pPr>
+              <a:lnSpc>
+                <a:spcPct val="100000"/>
+              </a:lnSpc>
+            </a:pPr>
             <a:endParaRPr b="0" lang="en-US" sz="1800" spc="-1" strike="noStrike">
               <a:solidFill>
                 <a:srgbClr val="ffffff"/>
@@ -3210,7 +3587,7 @@
         <p:spPr>
           <a:xfrm>
             <a:off x="4791600" y="3511440"/>
-            <a:ext cx="1992960" cy="475200"/>
+            <a:ext cx="1992600" cy="474840"/>
           </a:xfrm>
           <a:prstGeom prst="rect">
             <a:avLst/>
@@ -3267,7 +3644,7 @@
         <p:spPr>
           <a:xfrm>
             <a:off x="4791600" y="3986640"/>
-            <a:ext cx="1992960" cy="383760"/>
+            <a:ext cx="1992600" cy="383400"/>
           </a:xfrm>
           <a:prstGeom prst="rect">
             <a:avLst/>
@@ -3324,7 +3701,7 @@
         <p:spPr>
           <a:xfrm>
             <a:off x="6958440" y="3493080"/>
-            <a:ext cx="1992960" cy="914040"/>
+            <a:ext cx="1992600" cy="913680"/>
           </a:xfrm>
           <a:prstGeom prst="rect">
             <a:avLst/>
@@ -3350,6 +3727,11 @@
             <a:noAutofit/>
           </a:bodyPr>
           <a:p>
+            <a:pPr>
+              <a:lnSpc>
+                <a:spcPct val="100000"/>
+              </a:lnSpc>
+            </a:pPr>
             <a:endParaRPr b="0" lang="en-US" sz="1800" spc="-1" strike="noStrike">
               <a:solidFill>
                 <a:srgbClr val="ffffff"/>
@@ -3368,7 +3750,7 @@
         <p:spPr>
           <a:xfrm>
             <a:off x="6958440" y="3511440"/>
-            <a:ext cx="1992960" cy="475200"/>
+            <a:ext cx="1992600" cy="474840"/>
           </a:xfrm>
           <a:prstGeom prst="rect">
             <a:avLst/>
@@ -3425,7 +3807,7 @@
         <p:spPr>
           <a:xfrm>
             <a:off x="6958440" y="3986640"/>
-            <a:ext cx="1992960" cy="383760"/>
+            <a:ext cx="1992600" cy="383400"/>
           </a:xfrm>
           <a:prstGeom prst="rect">
             <a:avLst/>
@@ -3508,7 +3890,7 @@
         <p:spPr>
           <a:xfrm>
             <a:off x="457200" y="4754880"/>
-            <a:ext cx="8412120" cy="237240"/>
+            <a:ext cx="8411760" cy="236880"/>
           </a:xfrm>
           <a:prstGeom prst="rect">
             <a:avLst/>
@@ -3592,7 +3974,7 @@
         <p:spPr>
           <a:xfrm>
             <a:off x="6217920" y="-1097280"/>
-            <a:ext cx="4754520" cy="4754520"/>
+            <a:ext cx="4754160" cy="4754160"/>
           </a:xfrm>
           <a:prstGeom prst="ellipse">
             <a:avLst/>
@@ -3618,6 +4000,11 @@
             <a:noAutofit/>
           </a:bodyPr>
           <a:p>
+            <a:pPr>
+              <a:lnSpc>
+                <a:spcPct val="100000"/>
+              </a:lnSpc>
+            </a:pPr>
             <a:endParaRPr b="0" lang="en-US" sz="1800" spc="-1" strike="noStrike">
               <a:solidFill>
                 <a:srgbClr val="ffffff"/>
@@ -3636,7 +4023,7 @@
         <p:spPr>
           <a:xfrm>
             <a:off x="-1371600" y="3108960"/>
-            <a:ext cx="3840120" cy="3840120"/>
+            <a:ext cx="3839760" cy="3839760"/>
           </a:xfrm>
           <a:prstGeom prst="ellipse">
             <a:avLst/>
@@ -3666,6 +4053,11 @@
             <a:noAutofit/>
           </a:bodyPr>
           <a:p>
+            <a:pPr>
+              <a:lnSpc>
+                <a:spcPct val="100000"/>
+              </a:lnSpc>
+            </a:pPr>
             <a:endParaRPr b="0" lang="en-US" sz="1800" spc="-1" strike="noStrike">
               <a:solidFill>
                 <a:srgbClr val="ffffff"/>
@@ -3684,7 +4076,7 @@
         <p:spPr>
           <a:xfrm>
             <a:off x="0" y="0"/>
-            <a:ext cx="200880" cy="5143320"/>
+            <a:ext cx="200520" cy="5142960"/>
           </a:xfrm>
           <a:prstGeom prst="rect">
             <a:avLst/>
@@ -3710,6 +4102,11 @@
             <a:noAutofit/>
           </a:bodyPr>
           <a:p>
+            <a:pPr>
+              <a:lnSpc>
+                <a:spcPct val="100000"/>
+              </a:lnSpc>
+            </a:pPr>
             <a:endParaRPr b="0" lang="en-US" sz="1800" spc="-1" strike="noStrike">
               <a:solidFill>
                 <a:srgbClr val="ffffff"/>
@@ -3728,7 +4125,7 @@
         <p:spPr>
           <a:xfrm>
             <a:off x="457200" y="255960"/>
-            <a:ext cx="8229240" cy="594000"/>
+            <a:ext cx="8228880" cy="593640"/>
           </a:xfrm>
           <a:prstGeom prst="rect">
             <a:avLst/>
@@ -3785,7 +4182,7 @@
         <p:spPr>
           <a:xfrm>
             <a:off x="457200" y="859680"/>
-            <a:ext cx="6400440" cy="273960"/>
+            <a:ext cx="6400080" cy="273600"/>
           </a:xfrm>
           <a:prstGeom prst="rect">
             <a:avLst/>
@@ -3841,7 +4238,7 @@
         <p:spPr>
           <a:xfrm>
             <a:off x="457200" y="1389960"/>
-            <a:ext cx="347040" cy="347040"/>
+            <a:ext cx="346680" cy="346680"/>
           </a:xfrm>
           <a:prstGeom prst="ellipse">
             <a:avLst/>
@@ -3867,6 +4264,11 @@
             <a:noAutofit/>
           </a:bodyPr>
           <a:p>
+            <a:pPr>
+              <a:lnSpc>
+                <a:spcPct val="100000"/>
+              </a:lnSpc>
+            </a:pPr>
             <a:endParaRPr b="0" lang="en-US" sz="1800" spc="-1" strike="noStrike">
               <a:solidFill>
                 <a:srgbClr val="ffffff"/>
@@ -3885,7 +4287,7 @@
         <p:spPr>
           <a:xfrm>
             <a:off x="457200" y="1389960"/>
-            <a:ext cx="347040" cy="347040"/>
+            <a:ext cx="346680" cy="346680"/>
           </a:xfrm>
           <a:prstGeom prst="rect">
             <a:avLst/>
@@ -3941,7 +4343,7 @@
         <p:spPr>
           <a:xfrm>
             <a:off x="951120" y="1334880"/>
-            <a:ext cx="7772040" cy="529920"/>
+            <a:ext cx="7771680" cy="529560"/>
           </a:xfrm>
           <a:prstGeom prst="rect">
             <a:avLst/>
@@ -3998,7 +4400,7 @@
         <p:spPr>
           <a:xfrm>
             <a:off x="457200" y="2002680"/>
-            <a:ext cx="347040" cy="347040"/>
+            <a:ext cx="346680" cy="346680"/>
           </a:xfrm>
           <a:prstGeom prst="ellipse">
             <a:avLst/>
@@ -4024,6 +4426,11 @@
             <a:noAutofit/>
           </a:bodyPr>
           <a:p>
+            <a:pPr>
+              <a:lnSpc>
+                <a:spcPct val="100000"/>
+              </a:lnSpc>
+            </a:pPr>
             <a:endParaRPr b="0" lang="en-US" sz="1800" spc="-1" strike="noStrike">
               <a:solidFill>
                 <a:srgbClr val="ffffff"/>
@@ -4042,7 +4449,7 @@
         <p:spPr>
           <a:xfrm>
             <a:off x="457200" y="2002680"/>
-            <a:ext cx="347040" cy="347040"/>
+            <a:ext cx="346680" cy="346680"/>
           </a:xfrm>
           <a:prstGeom prst="rect">
             <a:avLst/>
@@ -4098,7 +4505,7 @@
         <p:spPr>
           <a:xfrm>
             <a:off x="951120" y="1947600"/>
-            <a:ext cx="7772040" cy="529920"/>
+            <a:ext cx="7771680" cy="529560"/>
           </a:xfrm>
           <a:prstGeom prst="rect">
             <a:avLst/>
@@ -4155,7 +4562,7 @@
         <p:spPr>
           <a:xfrm>
             <a:off x="457200" y="2615040"/>
-            <a:ext cx="347040" cy="347040"/>
+            <a:ext cx="346680" cy="346680"/>
           </a:xfrm>
           <a:prstGeom prst="ellipse">
             <a:avLst/>
@@ -4181,6 +4588,11 @@
             <a:noAutofit/>
           </a:bodyPr>
           <a:p>
+            <a:pPr>
+              <a:lnSpc>
+                <a:spcPct val="100000"/>
+              </a:lnSpc>
+            </a:pPr>
             <a:endParaRPr b="0" lang="en-US" sz="1800" spc="-1" strike="noStrike">
               <a:solidFill>
                 <a:srgbClr val="ffffff"/>
@@ -4199,7 +4611,7 @@
         <p:spPr>
           <a:xfrm>
             <a:off x="457200" y="2615040"/>
-            <a:ext cx="347040" cy="347040"/>
+            <a:ext cx="346680" cy="346680"/>
           </a:xfrm>
           <a:prstGeom prst="rect">
             <a:avLst/>
@@ -4255,7 +4667,7 @@
         <p:spPr>
           <a:xfrm>
             <a:off x="951120" y="2560320"/>
-            <a:ext cx="7772040" cy="529920"/>
+            <a:ext cx="7771680" cy="529560"/>
           </a:xfrm>
           <a:prstGeom prst="rect">
             <a:avLst/>
@@ -4312,7 +4724,7 @@
         <p:spPr>
           <a:xfrm>
             <a:off x="457200" y="3227760"/>
-            <a:ext cx="347040" cy="347040"/>
+            <a:ext cx="346680" cy="346680"/>
           </a:xfrm>
           <a:prstGeom prst="ellipse">
             <a:avLst/>
@@ -4338,6 +4750,11 @@
             <a:noAutofit/>
           </a:bodyPr>
           <a:p>
+            <a:pPr>
+              <a:lnSpc>
+                <a:spcPct val="100000"/>
+              </a:lnSpc>
+            </a:pPr>
             <a:endParaRPr b="0" lang="en-US" sz="1800" spc="-1" strike="noStrike">
               <a:solidFill>
                 <a:srgbClr val="ffffff"/>
@@ -4356,7 +4773,7 @@
         <p:spPr>
           <a:xfrm>
             <a:off x="457200" y="3227760"/>
-            <a:ext cx="347040" cy="347040"/>
+            <a:ext cx="346680" cy="346680"/>
           </a:xfrm>
           <a:prstGeom prst="rect">
             <a:avLst/>
@@ -4412,7 +4829,7 @@
         <p:spPr>
           <a:xfrm>
             <a:off x="951120" y="3173040"/>
-            <a:ext cx="7772040" cy="529920"/>
+            <a:ext cx="7771680" cy="529560"/>
           </a:xfrm>
           <a:prstGeom prst="rect">
             <a:avLst/>
@@ -4469,7 +4886,7 @@
         <p:spPr>
           <a:xfrm>
             <a:off x="457200" y="3840480"/>
-            <a:ext cx="347040" cy="347040"/>
+            <a:ext cx="346680" cy="346680"/>
           </a:xfrm>
           <a:prstGeom prst="ellipse">
             <a:avLst/>
@@ -4495,6 +4912,11 @@
             <a:noAutofit/>
           </a:bodyPr>
           <a:p>
+            <a:pPr>
+              <a:lnSpc>
+                <a:spcPct val="100000"/>
+              </a:lnSpc>
+            </a:pPr>
             <a:endParaRPr b="0" lang="en-US" sz="1800" spc="-1" strike="noStrike">
               <a:solidFill>
                 <a:srgbClr val="ffffff"/>
@@ -4513,7 +4935,7 @@
         <p:spPr>
           <a:xfrm>
             <a:off x="457200" y="3840480"/>
-            <a:ext cx="347040" cy="347040"/>
+            <a:ext cx="346680" cy="346680"/>
           </a:xfrm>
           <a:prstGeom prst="rect">
             <a:avLst/>
@@ -4569,7 +4991,7 @@
         <p:spPr>
           <a:xfrm>
             <a:off x="951120" y="3785760"/>
-            <a:ext cx="7772040" cy="529920"/>
+            <a:ext cx="7771680" cy="529560"/>
           </a:xfrm>
           <a:prstGeom prst="rect">
             <a:avLst/>
@@ -4626,7 +5048,7 @@
         <p:spPr>
           <a:xfrm>
             <a:off x="457200" y="4453200"/>
-            <a:ext cx="347040" cy="347040"/>
+            <a:ext cx="346680" cy="346680"/>
           </a:xfrm>
           <a:prstGeom prst="ellipse">
             <a:avLst/>
@@ -4652,6 +5074,11 @@
             <a:noAutofit/>
           </a:bodyPr>
           <a:p>
+            <a:pPr>
+              <a:lnSpc>
+                <a:spcPct val="100000"/>
+              </a:lnSpc>
+            </a:pPr>
             <a:endParaRPr b="0" lang="en-US" sz="1800" spc="-1" strike="noStrike">
               <a:solidFill>
                 <a:srgbClr val="ffffff"/>
@@ -4670,7 +5097,7 @@
         <p:spPr>
           <a:xfrm>
             <a:off x="457200" y="4453200"/>
-            <a:ext cx="347040" cy="347040"/>
+            <a:ext cx="346680" cy="346680"/>
           </a:xfrm>
           <a:prstGeom prst="rect">
             <a:avLst/>
@@ -4726,7 +5153,7 @@
         <p:spPr>
           <a:xfrm>
             <a:off x="951120" y="4398120"/>
-            <a:ext cx="7772040" cy="529920"/>
+            <a:ext cx="7771680" cy="529560"/>
           </a:xfrm>
           <a:prstGeom prst="rect">
             <a:avLst/>
@@ -4783,7 +5210,7 @@
         <p:spPr>
           <a:xfrm>
             <a:off x="457200" y="4663440"/>
-            <a:ext cx="8320680" cy="383760"/>
+            <a:ext cx="8320320" cy="383400"/>
           </a:xfrm>
           <a:prstGeom prst="rect">
             <a:avLst/>
@@ -4809,6 +5236,11 @@
             <a:noAutofit/>
           </a:bodyPr>
           <a:p>
+            <a:pPr>
+              <a:lnSpc>
+                <a:spcPct val="100000"/>
+              </a:lnSpc>
+            </a:pPr>
             <a:endParaRPr b="0" lang="en-US" sz="1800" spc="-1" strike="noStrike">
               <a:solidFill>
                 <a:srgbClr val="ffffff"/>
@@ -4827,7 +5259,7 @@
         <p:spPr>
           <a:xfrm>
             <a:off x="457200" y="4663440"/>
-            <a:ext cx="8320680" cy="383760"/>
+            <a:ext cx="8320320" cy="383400"/>
           </a:xfrm>
           <a:prstGeom prst="rect">
             <a:avLst/>
@@ -4921,7 +5353,7 @@
         <p:spPr>
           <a:xfrm>
             <a:off x="0" y="0"/>
-            <a:ext cx="9143640" cy="959760"/>
+            <a:ext cx="9143280" cy="959400"/>
           </a:xfrm>
           <a:prstGeom prst="rect">
             <a:avLst/>
@@ -4947,6 +5379,11 @@
             <a:noAutofit/>
           </a:bodyPr>
           <a:p>
+            <a:pPr>
+              <a:lnSpc>
+                <a:spcPct val="100000"/>
+              </a:lnSpc>
+            </a:pPr>
             <a:endParaRPr b="0" lang="en-US" sz="1800" spc="-1" strike="noStrike">
               <a:solidFill>
                 <a:srgbClr val="ffffff"/>
@@ -4965,7 +5402,7 @@
         <p:spPr>
           <a:xfrm>
             <a:off x="0" y="960120"/>
-            <a:ext cx="9143640" cy="63720"/>
+            <a:ext cx="9143280" cy="63360"/>
           </a:xfrm>
           <a:prstGeom prst="rect">
             <a:avLst/>
@@ -4991,6 +5428,11 @@
             <a:noAutofit/>
           </a:bodyPr>
           <a:p>
+            <a:pPr>
+              <a:lnSpc>
+                <a:spcPct val="100000"/>
+              </a:lnSpc>
+            </a:pPr>
             <a:endParaRPr b="0" lang="en-US" sz="1800" spc="-1" strike="noStrike">
               <a:solidFill>
                 <a:srgbClr val="ffffff"/>
@@ -5009,7 +5451,7 @@
         <p:spPr>
           <a:xfrm>
             <a:off x="411480" y="0"/>
-            <a:ext cx="8320680" cy="959760"/>
+            <a:ext cx="8320320" cy="959400"/>
           </a:xfrm>
           <a:prstGeom prst="rect">
             <a:avLst/>
@@ -5066,7 +5508,7 @@
         <p:spPr>
           <a:xfrm>
             <a:off x="365760" y="1170360"/>
-            <a:ext cx="8412120" cy="1051200"/>
+            <a:ext cx="8411760" cy="1050840"/>
           </a:xfrm>
           <a:prstGeom prst="rect">
             <a:avLst/>
@@ -5099,6 +5541,11 @@
             <a:noAutofit/>
           </a:bodyPr>
           <a:p>
+            <a:pPr>
+              <a:lnSpc>
+                <a:spcPct val="100000"/>
+              </a:lnSpc>
+            </a:pPr>
             <a:endParaRPr b="0" lang="en-US" sz="1800" spc="-1" strike="noStrike">
               <a:solidFill>
                 <a:srgbClr val="ffffff"/>
@@ -5117,7 +5564,7 @@
         <p:spPr>
           <a:xfrm>
             <a:off x="548640" y="1188720"/>
-            <a:ext cx="8092080" cy="1005480"/>
+            <a:ext cx="8091720" cy="1005120"/>
           </a:xfrm>
           <a:prstGeom prst="rect">
             <a:avLst/>
@@ -5204,7 +5651,7 @@
         <p:spPr>
           <a:xfrm>
             <a:off x="347400" y="2395800"/>
-            <a:ext cx="2724480" cy="2486880"/>
+            <a:ext cx="2724120" cy="2486520"/>
           </a:xfrm>
           <a:prstGeom prst="rect">
             <a:avLst/>
@@ -5237,6 +5684,11 @@
             <a:noAutofit/>
           </a:bodyPr>
           <a:p>
+            <a:pPr>
+              <a:lnSpc>
+                <a:spcPct val="100000"/>
+              </a:lnSpc>
+            </a:pPr>
             <a:endParaRPr b="0" lang="en-US" sz="1800" spc="-1" strike="noStrike">
               <a:solidFill>
                 <a:srgbClr val="ffffff"/>
@@ -5255,7 +5707,7 @@
         <p:spPr>
           <a:xfrm>
             <a:off x="347400" y="2395800"/>
-            <a:ext cx="2724480" cy="475200"/>
+            <a:ext cx="2724120" cy="474840"/>
           </a:xfrm>
           <a:prstGeom prst="rect">
             <a:avLst/>
@@ -5281,6 +5733,11 @@
             <a:noAutofit/>
           </a:bodyPr>
           <a:p>
+            <a:pPr>
+              <a:lnSpc>
+                <a:spcPct val="100000"/>
+              </a:lnSpc>
+            </a:pPr>
             <a:endParaRPr b="0" lang="en-US" sz="1800" spc="-1" strike="noStrike">
               <a:solidFill>
                 <a:srgbClr val="ffffff"/>
@@ -5299,7 +5756,7 @@
         <p:spPr>
           <a:xfrm>
             <a:off x="347400" y="2395800"/>
-            <a:ext cx="2724480" cy="475200"/>
+            <a:ext cx="2724120" cy="474840"/>
           </a:xfrm>
           <a:prstGeom prst="rect">
             <a:avLst/>
@@ -5355,7 +5812,7 @@
         <p:spPr>
           <a:xfrm>
             <a:off x="438840" y="2926080"/>
-            <a:ext cx="2541600" cy="475200"/>
+            <a:ext cx="2541240" cy="474840"/>
           </a:xfrm>
           <a:prstGeom prst="rect">
             <a:avLst/>
@@ -5438,7 +5895,7 @@
         <p:spPr>
           <a:xfrm>
             <a:off x="457200" y="3420000"/>
-            <a:ext cx="2505240" cy="1325520"/>
+            <a:ext cx="2504880" cy="1325160"/>
           </a:xfrm>
           <a:prstGeom prst="rect">
             <a:avLst/>
@@ -5495,7 +5952,7 @@
         <p:spPr>
           <a:xfrm>
             <a:off x="3200400" y="2395800"/>
-            <a:ext cx="2724480" cy="2486880"/>
+            <a:ext cx="2724120" cy="2486520"/>
           </a:xfrm>
           <a:prstGeom prst="rect">
             <a:avLst/>
@@ -5528,6 +5985,11 @@
             <a:noAutofit/>
           </a:bodyPr>
           <a:p>
+            <a:pPr>
+              <a:lnSpc>
+                <a:spcPct val="100000"/>
+              </a:lnSpc>
+            </a:pPr>
             <a:endParaRPr b="0" lang="en-US" sz="1800" spc="-1" strike="noStrike">
               <a:solidFill>
                 <a:srgbClr val="ffffff"/>
@@ -5546,7 +6008,7 @@
         <p:spPr>
           <a:xfrm>
             <a:off x="3200400" y="2395800"/>
-            <a:ext cx="2724480" cy="475200"/>
+            <a:ext cx="2724120" cy="474840"/>
           </a:xfrm>
           <a:prstGeom prst="rect">
             <a:avLst/>
@@ -5572,6 +6034,11 @@
             <a:noAutofit/>
           </a:bodyPr>
           <a:p>
+            <a:pPr>
+              <a:lnSpc>
+                <a:spcPct val="100000"/>
+              </a:lnSpc>
+            </a:pPr>
             <a:endParaRPr b="0" lang="en-US" sz="1800" spc="-1" strike="noStrike">
               <a:solidFill>
                 <a:srgbClr val="ffffff"/>
@@ -5590,7 +6057,7 @@
         <p:spPr>
           <a:xfrm>
             <a:off x="3200400" y="2395800"/>
-            <a:ext cx="2724480" cy="475200"/>
+            <a:ext cx="2724120" cy="474840"/>
           </a:xfrm>
           <a:prstGeom prst="rect">
             <a:avLst/>
@@ -5646,7 +6113,7 @@
         <p:spPr>
           <a:xfrm>
             <a:off x="3291840" y="2926080"/>
-            <a:ext cx="2541600" cy="475200"/>
+            <a:ext cx="2541240" cy="474840"/>
           </a:xfrm>
           <a:prstGeom prst="rect">
             <a:avLst/>
@@ -5703,7 +6170,7 @@
         <p:spPr>
           <a:xfrm>
             <a:off x="3310200" y="3420000"/>
-            <a:ext cx="2505240" cy="1325520"/>
+            <a:ext cx="2504880" cy="1325160"/>
           </a:xfrm>
           <a:prstGeom prst="rect">
             <a:avLst/>
@@ -5760,7 +6227,7 @@
         <p:spPr>
           <a:xfrm>
             <a:off x="6053400" y="2395800"/>
-            <a:ext cx="2724480" cy="2486880"/>
+            <a:ext cx="2724120" cy="2486520"/>
           </a:xfrm>
           <a:prstGeom prst="rect">
             <a:avLst/>
@@ -5793,6 +6260,11 @@
             <a:noAutofit/>
           </a:bodyPr>
           <a:p>
+            <a:pPr>
+              <a:lnSpc>
+                <a:spcPct val="100000"/>
+              </a:lnSpc>
+            </a:pPr>
             <a:endParaRPr b="0" lang="en-US" sz="1800" spc="-1" strike="noStrike">
               <a:solidFill>
                 <a:srgbClr val="ffffff"/>
@@ -5811,7 +6283,7 @@
         <p:spPr>
           <a:xfrm>
             <a:off x="6053400" y="2395800"/>
-            <a:ext cx="2724480" cy="475200"/>
+            <a:ext cx="2724120" cy="474840"/>
           </a:xfrm>
           <a:prstGeom prst="rect">
             <a:avLst/>
@@ -5837,6 +6309,11 @@
             <a:noAutofit/>
           </a:bodyPr>
           <a:p>
+            <a:pPr>
+              <a:lnSpc>
+                <a:spcPct val="100000"/>
+              </a:lnSpc>
+            </a:pPr>
             <a:endParaRPr b="0" lang="en-US" sz="1800" spc="-1" strike="noStrike">
               <a:solidFill>
                 <a:srgbClr val="ffffff"/>
@@ -5855,7 +6332,7 @@
         <p:spPr>
           <a:xfrm>
             <a:off x="6053400" y="2395800"/>
-            <a:ext cx="2724480" cy="475200"/>
+            <a:ext cx="2724120" cy="474840"/>
           </a:xfrm>
           <a:prstGeom prst="rect">
             <a:avLst/>
@@ -5911,7 +6388,7 @@
         <p:spPr>
           <a:xfrm>
             <a:off x="6144840" y="2926080"/>
-            <a:ext cx="2541600" cy="475200"/>
+            <a:ext cx="2541240" cy="474840"/>
           </a:xfrm>
           <a:prstGeom prst="rect">
             <a:avLst/>
@@ -5994,7 +6471,7 @@
         <p:spPr>
           <a:xfrm>
             <a:off x="6163200" y="3420000"/>
-            <a:ext cx="2505240" cy="1325520"/>
+            <a:ext cx="2504880" cy="1325160"/>
           </a:xfrm>
           <a:prstGeom prst="rect">
             <a:avLst/>
@@ -6088,7 +6565,7 @@
         <p:spPr>
           <a:xfrm>
             <a:off x="0" y="0"/>
-            <a:ext cx="9143640" cy="914040"/>
+            <a:ext cx="9143280" cy="913680"/>
           </a:xfrm>
           <a:prstGeom prst="rect">
             <a:avLst/>
@@ -6114,6 +6591,11 @@
             <a:noAutofit/>
           </a:bodyPr>
           <a:p>
+            <a:pPr>
+              <a:lnSpc>
+                <a:spcPct val="100000"/>
+              </a:lnSpc>
+            </a:pPr>
             <a:endParaRPr b="0" lang="en-US" sz="1800" spc="-1" strike="noStrike">
               <a:solidFill>
                 <a:srgbClr val="ffffff"/>
@@ -6132,7 +6614,7 @@
         <p:spPr>
           <a:xfrm>
             <a:off x="0" y="914400"/>
-            <a:ext cx="9143640" cy="54360"/>
+            <a:ext cx="9143280" cy="54000"/>
           </a:xfrm>
           <a:prstGeom prst="rect">
             <a:avLst/>
@@ -6158,6 +6640,11 @@
             <a:noAutofit/>
           </a:bodyPr>
           <a:p>
+            <a:pPr>
+              <a:lnSpc>
+                <a:spcPct val="100000"/>
+              </a:lnSpc>
+            </a:pPr>
             <a:endParaRPr b="0" lang="en-US" sz="1800" spc="-1" strike="noStrike">
               <a:solidFill>
                 <a:srgbClr val="ffffff"/>
@@ -6176,7 +6663,7 @@
         <p:spPr>
           <a:xfrm>
             <a:off x="411480" y="0"/>
-            <a:ext cx="8320680" cy="914040"/>
+            <a:ext cx="8320320" cy="913680"/>
           </a:xfrm>
           <a:prstGeom prst="rect">
             <a:avLst/>
@@ -6233,7 +6720,7 @@
         <p:spPr>
           <a:xfrm>
             <a:off x="274320" y="1042560"/>
-            <a:ext cx="2761200" cy="1755360"/>
+            <a:ext cx="2760840" cy="1755000"/>
           </a:xfrm>
           <a:prstGeom prst="rect">
             <a:avLst/>
@@ -6266,6 +6753,11 @@
             <a:noAutofit/>
           </a:bodyPr>
           <a:p>
+            <a:pPr>
+              <a:lnSpc>
+                <a:spcPct val="100000"/>
+              </a:lnSpc>
+            </a:pPr>
             <a:endParaRPr b="0" lang="en-US" sz="1800" spc="-1" strike="noStrike">
               <a:solidFill>
                 <a:srgbClr val="ffffff"/>
@@ -6284,7 +6776,7 @@
         <p:spPr>
           <a:xfrm>
             <a:off x="274320" y="1042560"/>
-            <a:ext cx="2761200" cy="109440"/>
+            <a:ext cx="2760840" cy="109080"/>
           </a:xfrm>
           <a:prstGeom prst="rect">
             <a:avLst/>
@@ -6310,6 +6802,11 @@
             <a:noAutofit/>
           </a:bodyPr>
           <a:p>
+            <a:pPr>
+              <a:lnSpc>
+                <a:spcPct val="100000"/>
+              </a:lnSpc>
+            </a:pPr>
             <a:endParaRPr b="0" lang="en-US" sz="1800" spc="-1" strike="noStrike">
               <a:solidFill>
                 <a:srgbClr val="ffffff"/>
@@ -6328,7 +6825,7 @@
         <p:spPr>
           <a:xfrm>
             <a:off x="475560" y="1243440"/>
-            <a:ext cx="502560" cy="502560"/>
+            <a:ext cx="502200" cy="502200"/>
           </a:xfrm>
           <a:prstGeom prst="ellipse">
             <a:avLst/>
@@ -6354,6 +6851,11 @@
             <a:noAutofit/>
           </a:bodyPr>
           <a:p>
+            <a:pPr>
+              <a:lnSpc>
+                <a:spcPct val="100000"/>
+              </a:lnSpc>
+            </a:pPr>
             <a:endParaRPr b="0" lang="en-US" sz="1800" spc="-1" strike="noStrike">
               <a:solidFill>
                 <a:srgbClr val="ffffff"/>
@@ -6372,7 +6874,7 @@
         <p:spPr>
           <a:xfrm>
             <a:off x="475560" y="1243440"/>
-            <a:ext cx="502560" cy="502560"/>
+            <a:ext cx="502200" cy="502200"/>
           </a:xfrm>
           <a:prstGeom prst="rect">
             <a:avLst/>
@@ -6428,7 +6930,7 @@
         <p:spPr>
           <a:xfrm>
             <a:off x="1078920" y="1243440"/>
-            <a:ext cx="1828440" cy="475200"/>
+            <a:ext cx="1828080" cy="474840"/>
           </a:xfrm>
           <a:prstGeom prst="rect">
             <a:avLst/>
@@ -6485,7 +6987,7 @@
         <p:spPr>
           <a:xfrm>
             <a:off x="384120" y="1828800"/>
-            <a:ext cx="2559960" cy="895680"/>
+            <a:ext cx="2559600" cy="895320"/>
           </a:xfrm>
           <a:prstGeom prst="rect">
             <a:avLst/>
@@ -6542,7 +7044,7 @@
         <p:spPr>
           <a:xfrm>
             <a:off x="3182040" y="1042560"/>
-            <a:ext cx="2761200" cy="1755360"/>
+            <a:ext cx="2760840" cy="1755000"/>
           </a:xfrm>
           <a:prstGeom prst="rect">
             <a:avLst/>
@@ -6575,6 +7077,11 @@
             <a:noAutofit/>
           </a:bodyPr>
           <a:p>
+            <a:pPr>
+              <a:lnSpc>
+                <a:spcPct val="100000"/>
+              </a:lnSpc>
+            </a:pPr>
             <a:endParaRPr b="0" lang="en-US" sz="1800" spc="-1" strike="noStrike">
               <a:solidFill>
                 <a:srgbClr val="ffffff"/>
@@ -6593,7 +7100,7 @@
         <p:spPr>
           <a:xfrm>
             <a:off x="3182040" y="1042560"/>
-            <a:ext cx="2761200" cy="109440"/>
+            <a:ext cx="2760840" cy="109080"/>
           </a:xfrm>
           <a:prstGeom prst="rect">
             <a:avLst/>
@@ -6619,6 +7126,11 @@
             <a:noAutofit/>
           </a:bodyPr>
           <a:p>
+            <a:pPr>
+              <a:lnSpc>
+                <a:spcPct val="100000"/>
+              </a:lnSpc>
+            </a:pPr>
             <a:endParaRPr b="0" lang="en-US" sz="1800" spc="-1" strike="noStrike">
               <a:solidFill>
                 <a:srgbClr val="ffffff"/>
@@ -6637,7 +7149,7 @@
         <p:spPr>
           <a:xfrm>
             <a:off x="3383280" y="1243440"/>
-            <a:ext cx="502560" cy="502560"/>
+            <a:ext cx="502200" cy="502200"/>
           </a:xfrm>
           <a:prstGeom prst="ellipse">
             <a:avLst/>
@@ -6663,6 +7175,11 @@
             <a:noAutofit/>
           </a:bodyPr>
           <a:p>
+            <a:pPr>
+              <a:lnSpc>
+                <a:spcPct val="100000"/>
+              </a:lnSpc>
+            </a:pPr>
             <a:endParaRPr b="0" lang="en-US" sz="1800" spc="-1" strike="noStrike">
               <a:solidFill>
                 <a:srgbClr val="ffffff"/>
@@ -6681,7 +7198,7 @@
         <p:spPr>
           <a:xfrm>
             <a:off x="3383280" y="1243440"/>
-            <a:ext cx="502560" cy="502560"/>
+            <a:ext cx="502200" cy="502200"/>
           </a:xfrm>
           <a:prstGeom prst="rect">
             <a:avLst/>
@@ -6737,7 +7254,7 @@
         <p:spPr>
           <a:xfrm>
             <a:off x="3986640" y="1243440"/>
-            <a:ext cx="1828440" cy="475200"/>
+            <a:ext cx="1828080" cy="474840"/>
           </a:xfrm>
           <a:prstGeom prst="rect">
             <a:avLst/>
@@ -6794,7 +7311,7 @@
         <p:spPr>
           <a:xfrm>
             <a:off x="3291840" y="1828800"/>
-            <a:ext cx="2559960" cy="895680"/>
+            <a:ext cx="2559600" cy="895320"/>
           </a:xfrm>
           <a:prstGeom prst="rect">
             <a:avLst/>
@@ -6851,7 +7368,7 @@
         <p:spPr>
           <a:xfrm>
             <a:off x="6089760" y="1042560"/>
-            <a:ext cx="2761200" cy="1755360"/>
+            <a:ext cx="2760840" cy="1755000"/>
           </a:xfrm>
           <a:prstGeom prst="rect">
             <a:avLst/>
@@ -6884,6 +7401,11 @@
             <a:noAutofit/>
           </a:bodyPr>
           <a:p>
+            <a:pPr>
+              <a:lnSpc>
+                <a:spcPct val="100000"/>
+              </a:lnSpc>
+            </a:pPr>
             <a:endParaRPr b="0" lang="en-US" sz="1800" spc="-1" strike="noStrike">
               <a:solidFill>
                 <a:srgbClr val="ffffff"/>
@@ -6902,7 +7424,7 @@
         <p:spPr>
           <a:xfrm>
             <a:off x="6089760" y="1042560"/>
-            <a:ext cx="2761200" cy="109440"/>
+            <a:ext cx="2760840" cy="109080"/>
           </a:xfrm>
           <a:prstGeom prst="rect">
             <a:avLst/>
@@ -6928,6 +7450,11 @@
             <a:noAutofit/>
           </a:bodyPr>
           <a:p>
+            <a:pPr>
+              <a:lnSpc>
+                <a:spcPct val="100000"/>
+              </a:lnSpc>
+            </a:pPr>
             <a:endParaRPr b="0" lang="en-US" sz="1800" spc="-1" strike="noStrike">
               <a:solidFill>
                 <a:srgbClr val="ffffff"/>
@@ -6946,7 +7473,7 @@
         <p:spPr>
           <a:xfrm>
             <a:off x="6291000" y="1243440"/>
-            <a:ext cx="502560" cy="502560"/>
+            <a:ext cx="502200" cy="502200"/>
           </a:xfrm>
           <a:prstGeom prst="ellipse">
             <a:avLst/>
@@ -6972,6 +7499,11 @@
             <a:noAutofit/>
           </a:bodyPr>
           <a:p>
+            <a:pPr>
+              <a:lnSpc>
+                <a:spcPct val="100000"/>
+              </a:lnSpc>
+            </a:pPr>
             <a:endParaRPr b="0" lang="en-US" sz="1800" spc="-1" strike="noStrike">
               <a:solidFill>
                 <a:srgbClr val="ffffff"/>
@@ -6990,7 +7522,7 @@
         <p:spPr>
           <a:xfrm>
             <a:off x="6291000" y="1243440"/>
-            <a:ext cx="502560" cy="502560"/>
+            <a:ext cx="502200" cy="502200"/>
           </a:xfrm>
           <a:prstGeom prst="rect">
             <a:avLst/>
@@ -7046,7 +7578,7 @@
         <p:spPr>
           <a:xfrm>
             <a:off x="6894720" y="1243440"/>
-            <a:ext cx="1828440" cy="475200"/>
+            <a:ext cx="1828080" cy="474840"/>
           </a:xfrm>
           <a:prstGeom prst="rect">
             <a:avLst/>
@@ -7103,7 +7635,7 @@
         <p:spPr>
           <a:xfrm>
             <a:off x="6199560" y="1828800"/>
-            <a:ext cx="2559960" cy="895680"/>
+            <a:ext cx="2559600" cy="895320"/>
           </a:xfrm>
           <a:prstGeom prst="rect">
             <a:avLst/>
@@ -7160,7 +7692,7 @@
         <p:spPr>
           <a:xfrm>
             <a:off x="274320" y="2962800"/>
-            <a:ext cx="2761200" cy="1755360"/>
+            <a:ext cx="2760840" cy="1755000"/>
           </a:xfrm>
           <a:prstGeom prst="rect">
             <a:avLst/>
@@ -7193,6 +7725,11 @@
             <a:noAutofit/>
           </a:bodyPr>
           <a:p>
+            <a:pPr>
+              <a:lnSpc>
+                <a:spcPct val="100000"/>
+              </a:lnSpc>
+            </a:pPr>
             <a:endParaRPr b="0" lang="en-US" sz="1800" spc="-1" strike="noStrike">
               <a:solidFill>
                 <a:srgbClr val="ffffff"/>
@@ -7211,7 +7748,7 @@
         <p:spPr>
           <a:xfrm>
             <a:off x="274320" y="2962800"/>
-            <a:ext cx="2761200" cy="109440"/>
+            <a:ext cx="2760840" cy="109080"/>
           </a:xfrm>
           <a:prstGeom prst="rect">
             <a:avLst/>
@@ -7237,6 +7774,11 @@
             <a:noAutofit/>
           </a:bodyPr>
           <a:p>
+            <a:pPr>
+              <a:lnSpc>
+                <a:spcPct val="100000"/>
+              </a:lnSpc>
+            </a:pPr>
             <a:endParaRPr b="0" lang="en-US" sz="1800" spc="-1" strike="noStrike">
               <a:solidFill>
                 <a:srgbClr val="ffffff"/>
@@ -7255,7 +7797,7 @@
         <p:spPr>
           <a:xfrm>
             <a:off x="475560" y="3163680"/>
-            <a:ext cx="502560" cy="502560"/>
+            <a:ext cx="502200" cy="502200"/>
           </a:xfrm>
           <a:prstGeom prst="ellipse">
             <a:avLst/>
@@ -7281,6 +7823,11 @@
             <a:noAutofit/>
           </a:bodyPr>
           <a:p>
+            <a:pPr>
+              <a:lnSpc>
+                <a:spcPct val="100000"/>
+              </a:lnSpc>
+            </a:pPr>
             <a:endParaRPr b="0" lang="en-US" sz="1800" spc="-1" strike="noStrike">
               <a:solidFill>
                 <a:srgbClr val="ffffff"/>
@@ -7299,7 +7846,7 @@
         <p:spPr>
           <a:xfrm>
             <a:off x="475560" y="3163680"/>
-            <a:ext cx="502560" cy="502560"/>
+            <a:ext cx="502200" cy="502200"/>
           </a:xfrm>
           <a:prstGeom prst="rect">
             <a:avLst/>
@@ -7355,7 +7902,7 @@
         <p:spPr>
           <a:xfrm>
             <a:off x="1078920" y="3163680"/>
-            <a:ext cx="1828440" cy="475200"/>
+            <a:ext cx="1828080" cy="474840"/>
           </a:xfrm>
           <a:prstGeom prst="rect">
             <a:avLst/>
@@ -7412,7 +7959,7 @@
         <p:spPr>
           <a:xfrm>
             <a:off x="384120" y="3749040"/>
-            <a:ext cx="2559960" cy="895680"/>
+            <a:ext cx="2559600" cy="895320"/>
           </a:xfrm>
           <a:prstGeom prst="rect">
             <a:avLst/>
@@ -7469,7 +8016,7 @@
         <p:spPr>
           <a:xfrm>
             <a:off x="3182040" y="2962800"/>
-            <a:ext cx="2761200" cy="1755360"/>
+            <a:ext cx="2760840" cy="1755000"/>
           </a:xfrm>
           <a:prstGeom prst="rect">
             <a:avLst/>
@@ -7502,6 +8049,11 @@
             <a:noAutofit/>
           </a:bodyPr>
           <a:p>
+            <a:pPr>
+              <a:lnSpc>
+                <a:spcPct val="100000"/>
+              </a:lnSpc>
+            </a:pPr>
             <a:endParaRPr b="0" lang="en-US" sz="1800" spc="-1" strike="noStrike">
               <a:solidFill>
                 <a:srgbClr val="ffffff"/>
@@ -7520,7 +8072,7 @@
         <p:spPr>
           <a:xfrm>
             <a:off x="3182040" y="2962800"/>
-            <a:ext cx="2761200" cy="109440"/>
+            <a:ext cx="2760840" cy="109080"/>
           </a:xfrm>
           <a:prstGeom prst="rect">
             <a:avLst/>
@@ -7546,6 +8098,11 @@
             <a:noAutofit/>
           </a:bodyPr>
           <a:p>
+            <a:pPr>
+              <a:lnSpc>
+                <a:spcPct val="100000"/>
+              </a:lnSpc>
+            </a:pPr>
             <a:endParaRPr b="0" lang="en-US" sz="1800" spc="-1" strike="noStrike">
               <a:solidFill>
                 <a:srgbClr val="ffffff"/>
@@ -7564,7 +8121,7 @@
         <p:spPr>
           <a:xfrm>
             <a:off x="3383280" y="3163680"/>
-            <a:ext cx="502560" cy="502560"/>
+            <a:ext cx="502200" cy="502200"/>
           </a:xfrm>
           <a:prstGeom prst="ellipse">
             <a:avLst/>
@@ -7590,6 +8147,11 @@
             <a:noAutofit/>
           </a:bodyPr>
           <a:p>
+            <a:pPr>
+              <a:lnSpc>
+                <a:spcPct val="100000"/>
+              </a:lnSpc>
+            </a:pPr>
             <a:endParaRPr b="0" lang="en-US" sz="1800" spc="-1" strike="noStrike">
               <a:solidFill>
                 <a:srgbClr val="ffffff"/>
@@ -7608,7 +8170,7 @@
         <p:spPr>
           <a:xfrm>
             <a:off x="3383280" y="3163680"/>
-            <a:ext cx="502560" cy="502560"/>
+            <a:ext cx="502200" cy="502200"/>
           </a:xfrm>
           <a:prstGeom prst="rect">
             <a:avLst/>
@@ -7664,7 +8226,7 @@
         <p:spPr>
           <a:xfrm>
             <a:off x="3986640" y="3163680"/>
-            <a:ext cx="1828440" cy="475200"/>
+            <a:ext cx="1828080" cy="474840"/>
           </a:xfrm>
           <a:prstGeom prst="rect">
             <a:avLst/>
@@ -7721,7 +8283,7 @@
         <p:spPr>
           <a:xfrm>
             <a:off x="3291840" y="3749040"/>
-            <a:ext cx="2559960" cy="895680"/>
+            <a:ext cx="2559600" cy="895320"/>
           </a:xfrm>
           <a:prstGeom prst="rect">
             <a:avLst/>
@@ -7778,7 +8340,7 @@
         <p:spPr>
           <a:xfrm>
             <a:off x="6089760" y="2962800"/>
-            <a:ext cx="2761200" cy="1755360"/>
+            <a:ext cx="2760840" cy="1755000"/>
           </a:xfrm>
           <a:prstGeom prst="rect">
             <a:avLst/>
@@ -7811,6 +8373,11 @@
             <a:noAutofit/>
           </a:bodyPr>
           <a:p>
+            <a:pPr>
+              <a:lnSpc>
+                <a:spcPct val="100000"/>
+              </a:lnSpc>
+            </a:pPr>
             <a:endParaRPr b="0" lang="en-US" sz="1800" spc="-1" strike="noStrike">
               <a:solidFill>
                 <a:srgbClr val="ffffff"/>
@@ -7829,7 +8396,7 @@
         <p:spPr>
           <a:xfrm>
             <a:off x="6089760" y="2962800"/>
-            <a:ext cx="2761200" cy="109440"/>
+            <a:ext cx="2760840" cy="109080"/>
           </a:xfrm>
           <a:prstGeom prst="rect">
             <a:avLst/>
@@ -7855,6 +8422,11 @@
             <a:noAutofit/>
           </a:bodyPr>
           <a:p>
+            <a:pPr>
+              <a:lnSpc>
+                <a:spcPct val="100000"/>
+              </a:lnSpc>
+            </a:pPr>
             <a:endParaRPr b="0" lang="en-US" sz="1800" spc="-1" strike="noStrike">
               <a:solidFill>
                 <a:srgbClr val="ffffff"/>
@@ -7873,7 +8445,7 @@
         <p:spPr>
           <a:xfrm>
             <a:off x="6291000" y="3163680"/>
-            <a:ext cx="502560" cy="502560"/>
+            <a:ext cx="502200" cy="502200"/>
           </a:xfrm>
           <a:prstGeom prst="ellipse">
             <a:avLst/>
@@ -7899,6 +8471,11 @@
             <a:noAutofit/>
           </a:bodyPr>
           <a:p>
+            <a:pPr>
+              <a:lnSpc>
+                <a:spcPct val="100000"/>
+              </a:lnSpc>
+            </a:pPr>
             <a:endParaRPr b="0" lang="en-US" sz="1800" spc="-1" strike="noStrike">
               <a:solidFill>
                 <a:srgbClr val="ffffff"/>
@@ -7917,7 +8494,7 @@
         <p:spPr>
           <a:xfrm>
             <a:off x="6291000" y="3163680"/>
-            <a:ext cx="502560" cy="502560"/>
+            <a:ext cx="502200" cy="502200"/>
           </a:xfrm>
           <a:prstGeom prst="rect">
             <a:avLst/>
@@ -7973,7 +8550,7 @@
         <p:spPr>
           <a:xfrm>
             <a:off x="6894720" y="3163680"/>
-            <a:ext cx="1828440" cy="475200"/>
+            <a:ext cx="1828080" cy="474840"/>
           </a:xfrm>
           <a:prstGeom prst="rect">
             <a:avLst/>
@@ -8030,7 +8607,7 @@
         <p:spPr>
           <a:xfrm>
             <a:off x="6199560" y="3749040"/>
-            <a:ext cx="2559960" cy="895680"/>
+            <a:ext cx="2559600" cy="895320"/>
           </a:xfrm>
           <a:prstGeom prst="rect">
             <a:avLst/>
@@ -8087,7 +8664,7 @@
         <p:spPr>
           <a:xfrm>
             <a:off x="0" y="4736520"/>
-            <a:ext cx="9143640" cy="402120"/>
+            <a:ext cx="9143280" cy="401760"/>
           </a:xfrm>
           <a:prstGeom prst="rect">
             <a:avLst/>
@@ -8113,6 +8690,11 @@
             <a:noAutofit/>
           </a:bodyPr>
           <a:p>
+            <a:pPr>
+              <a:lnSpc>
+                <a:spcPct val="100000"/>
+              </a:lnSpc>
+            </a:pPr>
             <a:endParaRPr b="0" lang="en-US" sz="1800" spc="-1" strike="noStrike">
               <a:solidFill>
                 <a:srgbClr val="ffffff"/>
@@ -8131,7 +8713,7 @@
         <p:spPr>
           <a:xfrm>
             <a:off x="457200" y="4736520"/>
-            <a:ext cx="8229240" cy="402120"/>
+            <a:ext cx="8228880" cy="401760"/>
           </a:xfrm>
           <a:prstGeom prst="rect">
             <a:avLst/>
@@ -8225,7 +8807,7 @@
         <p:spPr>
           <a:xfrm>
             <a:off x="0" y="0"/>
-            <a:ext cx="9143640" cy="959760"/>
+            <a:ext cx="9143280" cy="959400"/>
           </a:xfrm>
           <a:prstGeom prst="rect">
             <a:avLst/>
@@ -8251,6 +8833,11 @@
             <a:noAutofit/>
           </a:bodyPr>
           <a:p>
+            <a:pPr>
+              <a:lnSpc>
+                <a:spcPct val="100000"/>
+              </a:lnSpc>
+            </a:pPr>
             <a:endParaRPr b="0" lang="en-US" sz="1800" spc="-1" strike="noStrike">
               <a:solidFill>
                 <a:srgbClr val="ffffff"/>
@@ -8269,7 +8856,7 @@
         <p:spPr>
           <a:xfrm>
             <a:off x="0" y="960120"/>
-            <a:ext cx="9143640" cy="63720"/>
+            <a:ext cx="9143280" cy="63360"/>
           </a:xfrm>
           <a:prstGeom prst="rect">
             <a:avLst/>
@@ -8295,6 +8882,11 @@
             <a:noAutofit/>
           </a:bodyPr>
           <a:p>
+            <a:pPr>
+              <a:lnSpc>
+                <a:spcPct val="100000"/>
+              </a:lnSpc>
+            </a:pPr>
             <a:endParaRPr b="0" lang="en-US" sz="1800" spc="-1" strike="noStrike">
               <a:solidFill>
                 <a:srgbClr val="ffffff"/>
@@ -8313,7 +8905,7 @@
         <p:spPr>
           <a:xfrm>
             <a:off x="411480" y="0"/>
-            <a:ext cx="8320680" cy="959760"/>
+            <a:ext cx="8320320" cy="959400"/>
           </a:xfrm>
           <a:prstGeom prst="rect">
             <a:avLst/>
@@ -8370,7 +8962,7 @@
         <p:spPr>
           <a:xfrm>
             <a:off x="365760" y="1170360"/>
-            <a:ext cx="8412120" cy="914040"/>
+            <a:ext cx="8411760" cy="913680"/>
           </a:xfrm>
           <a:prstGeom prst="rect">
             <a:avLst/>
@@ -8403,6 +8995,11 @@
             <a:noAutofit/>
           </a:bodyPr>
           <a:p>
+            <a:pPr>
+              <a:lnSpc>
+                <a:spcPct val="100000"/>
+              </a:lnSpc>
+            </a:pPr>
             <a:endParaRPr b="0" lang="en-US" sz="1800" spc="-1" strike="noStrike">
               <a:solidFill>
                 <a:srgbClr val="ffffff"/>
@@ -8421,7 +9018,7 @@
         <p:spPr>
           <a:xfrm>
             <a:off x="530280" y="1188720"/>
-            <a:ext cx="8092080" cy="868320"/>
+            <a:ext cx="8091720" cy="867960"/>
           </a:xfrm>
           <a:prstGeom prst="rect">
             <a:avLst/>
@@ -8508,7 +9105,7 @@
         <p:spPr>
           <a:xfrm>
             <a:off x="411480" y="2212920"/>
-            <a:ext cx="4114440" cy="347040"/>
+            <a:ext cx="4114080" cy="346680"/>
           </a:xfrm>
           <a:prstGeom prst="rect">
             <a:avLst/>
@@ -8565,7 +9162,7 @@
         <p:spPr>
           <a:xfrm>
             <a:off x="411480" y="2724840"/>
-            <a:ext cx="502560" cy="502560"/>
+            <a:ext cx="502200" cy="502200"/>
           </a:xfrm>
           <a:prstGeom prst="ellipse">
             <a:avLst/>
@@ -8591,6 +9188,11 @@
             <a:noAutofit/>
           </a:bodyPr>
           <a:p>
+            <a:pPr>
+              <a:lnSpc>
+                <a:spcPct val="100000"/>
+              </a:lnSpc>
+            </a:pPr>
             <a:endParaRPr b="0" lang="en-US" sz="1800" spc="-1" strike="noStrike">
               <a:solidFill>
                 <a:srgbClr val="ffffff"/>
@@ -8609,7 +9211,7 @@
         <p:spPr>
           <a:xfrm>
             <a:off x="411480" y="2724840"/>
-            <a:ext cx="502560" cy="502560"/>
+            <a:ext cx="502200" cy="502200"/>
           </a:xfrm>
           <a:prstGeom prst="rect">
             <a:avLst/>
@@ -8707,7 +9309,7 @@
         <p:spPr>
           <a:xfrm>
             <a:off x="1051560" y="2706480"/>
-            <a:ext cx="3245760" cy="273960"/>
+            <a:ext cx="3245400" cy="273600"/>
           </a:xfrm>
           <a:prstGeom prst="rect">
             <a:avLst/>
@@ -8764,7 +9366,7 @@
         <p:spPr>
           <a:xfrm>
             <a:off x="1051560" y="2980800"/>
-            <a:ext cx="3245760" cy="347040"/>
+            <a:ext cx="3245400" cy="346680"/>
           </a:xfrm>
           <a:prstGeom prst="rect">
             <a:avLst/>
@@ -8821,7 +9423,7 @@
         <p:spPr>
           <a:xfrm>
             <a:off x="411480" y="3529440"/>
-            <a:ext cx="502560" cy="502560"/>
+            <a:ext cx="502200" cy="502200"/>
           </a:xfrm>
           <a:prstGeom prst="ellipse">
             <a:avLst/>
@@ -8847,6 +9449,11 @@
             <a:noAutofit/>
           </a:bodyPr>
           <a:p>
+            <a:pPr>
+              <a:lnSpc>
+                <a:spcPct val="100000"/>
+              </a:lnSpc>
+            </a:pPr>
             <a:endParaRPr b="0" lang="en-US" sz="1800" spc="-1" strike="noStrike">
               <a:solidFill>
                 <a:srgbClr val="ffffff"/>
@@ -8865,7 +9472,7 @@
         <p:spPr>
           <a:xfrm>
             <a:off x="411480" y="3529440"/>
-            <a:ext cx="502560" cy="502560"/>
+            <a:ext cx="502200" cy="502200"/>
           </a:xfrm>
           <a:prstGeom prst="rect">
             <a:avLst/>
@@ -8963,7 +9570,7 @@
         <p:spPr>
           <a:xfrm>
             <a:off x="1051560" y="3511440"/>
-            <a:ext cx="3245760" cy="273960"/>
+            <a:ext cx="3245400" cy="273600"/>
           </a:xfrm>
           <a:prstGeom prst="rect">
             <a:avLst/>
@@ -9020,7 +9627,7 @@
         <p:spPr>
           <a:xfrm>
             <a:off x="1051560" y="3785760"/>
-            <a:ext cx="3245760" cy="347040"/>
+            <a:ext cx="3245400" cy="346680"/>
           </a:xfrm>
           <a:prstGeom prst="rect">
             <a:avLst/>
@@ -9077,7 +9684,7 @@
         <p:spPr>
           <a:xfrm>
             <a:off x="411480" y="4334400"/>
-            <a:ext cx="502560" cy="502560"/>
+            <a:ext cx="502200" cy="502200"/>
           </a:xfrm>
           <a:prstGeom prst="ellipse">
             <a:avLst/>
@@ -9103,6 +9710,11 @@
             <a:noAutofit/>
           </a:bodyPr>
           <a:p>
+            <a:pPr>
+              <a:lnSpc>
+                <a:spcPct val="100000"/>
+              </a:lnSpc>
+            </a:pPr>
             <a:endParaRPr b="0" lang="en-US" sz="1800" spc="-1" strike="noStrike">
               <a:solidFill>
                 <a:srgbClr val="ffffff"/>
@@ -9121,7 +9733,7 @@
         <p:spPr>
           <a:xfrm>
             <a:off x="411480" y="4334400"/>
-            <a:ext cx="502560" cy="502560"/>
+            <a:ext cx="502200" cy="502200"/>
           </a:xfrm>
           <a:prstGeom prst="rect">
             <a:avLst/>
@@ -9177,7 +9789,7 @@
         <p:spPr>
           <a:xfrm>
             <a:off x="1051560" y="4316040"/>
-            <a:ext cx="3245760" cy="273960"/>
+            <a:ext cx="3245400" cy="273600"/>
           </a:xfrm>
           <a:prstGeom prst="rect">
             <a:avLst/>
@@ -9234,7 +9846,7 @@
         <p:spPr>
           <a:xfrm>
             <a:off x="1051560" y="4590360"/>
-            <a:ext cx="3245760" cy="347040"/>
+            <a:ext cx="3245400" cy="346680"/>
           </a:xfrm>
           <a:prstGeom prst="rect">
             <a:avLst/>
@@ -9291,7 +9903,7 @@
         <p:spPr>
           <a:xfrm>
             <a:off x="4754880" y="2176200"/>
-            <a:ext cx="4114440" cy="2724480"/>
+            <a:ext cx="4114080" cy="2724120"/>
           </a:xfrm>
           <a:prstGeom prst="rect">
             <a:avLst/>
@@ -9324,6 +9936,11 @@
             <a:noAutofit/>
           </a:bodyPr>
           <a:p>
+            <a:pPr>
+              <a:lnSpc>
+                <a:spcPct val="100000"/>
+              </a:lnSpc>
+            </a:pPr>
             <a:endParaRPr b="0" lang="en-US" sz="1800" spc="-1" strike="noStrike">
               <a:solidFill>
                 <a:srgbClr val="ffffff"/>
@@ -9342,7 +9959,7 @@
         <p:spPr>
           <a:xfrm>
             <a:off x="4754880" y="2176200"/>
-            <a:ext cx="4114440" cy="438480"/>
+            <a:ext cx="4114080" cy="438120"/>
           </a:xfrm>
           <a:prstGeom prst="rect">
             <a:avLst/>
@@ -9368,6 +9985,11 @@
             <a:noAutofit/>
           </a:bodyPr>
           <a:p>
+            <a:pPr>
+              <a:lnSpc>
+                <a:spcPct val="100000"/>
+              </a:lnSpc>
+            </a:pPr>
             <a:endParaRPr b="0" lang="en-US" sz="1800" spc="-1" strike="noStrike">
               <a:solidFill>
                 <a:srgbClr val="ffffff"/>
@@ -9386,7 +10008,7 @@
         <p:spPr>
           <a:xfrm>
             <a:off x="4864680" y="2176200"/>
-            <a:ext cx="3894840" cy="438480"/>
+            <a:ext cx="3894480" cy="438120"/>
           </a:xfrm>
           <a:prstGeom prst="rect">
             <a:avLst/>
@@ -9443,7 +10065,7 @@
         <p:spPr>
           <a:xfrm>
             <a:off x="4864680" y="2706480"/>
-            <a:ext cx="3885840" cy="383760"/>
+            <a:ext cx="3885480" cy="383400"/>
           </a:xfrm>
           <a:prstGeom prst="rect">
             <a:avLst/>
@@ -9510,7 +10132,7 @@
         <p:spPr>
           <a:xfrm>
             <a:off x="4864680" y="3136320"/>
-            <a:ext cx="3885840" cy="383760"/>
+            <a:ext cx="3885480" cy="383400"/>
           </a:xfrm>
           <a:prstGeom prst="rect">
             <a:avLst/>
@@ -9577,7 +10199,7 @@
         <p:spPr>
           <a:xfrm>
             <a:off x="4864680" y="3566160"/>
-            <a:ext cx="3885840" cy="383760"/>
+            <a:ext cx="3885480" cy="383400"/>
           </a:xfrm>
           <a:prstGeom prst="rect">
             <a:avLst/>
@@ -9644,7 +10266,7 @@
         <p:spPr>
           <a:xfrm>
             <a:off x="4864680" y="3996000"/>
-            <a:ext cx="3885840" cy="383760"/>
+            <a:ext cx="3885480" cy="383400"/>
           </a:xfrm>
           <a:prstGeom prst="rect">
             <a:avLst/>
@@ -9711,7 +10333,7 @@
         <p:spPr>
           <a:xfrm>
             <a:off x="4864680" y="4425840"/>
-            <a:ext cx="3885840" cy="383760"/>
+            <a:ext cx="3885480" cy="383400"/>
           </a:xfrm>
           <a:prstGeom prst="rect">
             <a:avLst/>
@@ -9778,7 +10400,7 @@
         <p:spPr>
           <a:xfrm>
             <a:off x="365760" y="4773240"/>
-            <a:ext cx="8412120" cy="273960"/>
+            <a:ext cx="8411760" cy="273600"/>
           </a:xfrm>
           <a:prstGeom prst="rect">
             <a:avLst/>
@@ -9804,6 +10426,11 @@
             <a:noAutofit/>
           </a:bodyPr>
           <a:p>
+            <a:pPr>
+              <a:lnSpc>
+                <a:spcPct val="100000"/>
+              </a:lnSpc>
+            </a:pPr>
             <a:endParaRPr b="0" lang="en-US" sz="1800" spc="-1" strike="noStrike">
               <a:solidFill>
                 <a:srgbClr val="000000"/>
@@ -9822,7 +10449,7 @@
         <p:spPr>
           <a:xfrm>
             <a:off x="475560" y="4773240"/>
-            <a:ext cx="8192520" cy="273960"/>
+            <a:ext cx="8192160" cy="273600"/>
           </a:xfrm>
           <a:prstGeom prst="rect">
             <a:avLst/>
@@ -9916,7 +10543,7 @@
         <p:spPr>
           <a:xfrm>
             <a:off x="0" y="0"/>
-            <a:ext cx="9143640" cy="914040"/>
+            <a:ext cx="9143280" cy="913680"/>
           </a:xfrm>
           <a:prstGeom prst="rect">
             <a:avLst/>
@@ -9942,6 +10569,11 @@
             <a:noAutofit/>
           </a:bodyPr>
           <a:p>
+            <a:pPr>
+              <a:lnSpc>
+                <a:spcPct val="100000"/>
+              </a:lnSpc>
+            </a:pPr>
             <a:endParaRPr b="0" lang="en-US" sz="1800" spc="-1" strike="noStrike">
               <a:solidFill>
                 <a:srgbClr val="ffffff"/>
@@ -9960,7 +10592,7 @@
         <p:spPr>
           <a:xfrm>
             <a:off x="0" y="914400"/>
-            <a:ext cx="9143640" cy="54360"/>
+            <a:ext cx="9143280" cy="54000"/>
           </a:xfrm>
           <a:prstGeom prst="rect">
             <a:avLst/>
@@ -9986,6 +10618,11 @@
             <a:noAutofit/>
           </a:bodyPr>
           <a:p>
+            <a:pPr>
+              <a:lnSpc>
+                <a:spcPct val="100000"/>
+              </a:lnSpc>
+            </a:pPr>
             <a:endParaRPr b="0" lang="en-US" sz="1800" spc="-1" strike="noStrike">
               <a:solidFill>
                 <a:srgbClr val="ffffff"/>
@@ -10004,7 +10641,7 @@
         <p:spPr>
           <a:xfrm>
             <a:off x="411480" y="0"/>
-            <a:ext cx="8320680" cy="914040"/>
+            <a:ext cx="8320320" cy="913680"/>
           </a:xfrm>
           <a:prstGeom prst="rect">
             <a:avLst/>
@@ -10061,7 +10698,7 @@
         <p:spPr>
           <a:xfrm>
             <a:off x="320040" y="1078920"/>
-            <a:ext cx="8503560" cy="822600"/>
+            <a:ext cx="8503200" cy="822240"/>
           </a:xfrm>
           <a:prstGeom prst="rect">
             <a:avLst/>
@@ -10087,6 +10724,11 @@
             <a:noAutofit/>
           </a:bodyPr>
           <a:p>
+            <a:pPr>
+              <a:lnSpc>
+                <a:spcPct val="100000"/>
+              </a:lnSpc>
+            </a:pPr>
             <a:endParaRPr b="0" lang="en-US" sz="1800" spc="-1" strike="noStrike">
               <a:solidFill>
                 <a:srgbClr val="ffffff"/>
@@ -10105,7 +10747,7 @@
         <p:spPr>
           <a:xfrm>
             <a:off x="475560" y="1097280"/>
-            <a:ext cx="8229240" cy="767880"/>
+            <a:ext cx="8228880" cy="767520"/>
           </a:xfrm>
           <a:prstGeom prst="rect">
             <a:avLst/>
@@ -10172,7 +10814,7 @@
         <p:spPr>
           <a:xfrm>
             <a:off x="320040" y="2030040"/>
-            <a:ext cx="5028840" cy="2815920"/>
+            <a:ext cx="5028480" cy="2815560"/>
           </a:xfrm>
           <a:prstGeom prst="rect">
             <a:avLst/>
@@ -10205,6 +10847,11 @@
             <a:noAutofit/>
           </a:bodyPr>
           <a:p>
+            <a:pPr>
+              <a:lnSpc>
+                <a:spcPct val="100000"/>
+              </a:lnSpc>
+            </a:pPr>
             <a:endParaRPr b="0" lang="en-US" sz="1800" spc="-1" strike="noStrike">
               <a:solidFill>
                 <a:srgbClr val="ffffff"/>
@@ -10223,7 +10870,7 @@
         <p:spPr>
           <a:xfrm>
             <a:off x="320040" y="2030040"/>
-            <a:ext cx="5028840" cy="456840"/>
+            <a:ext cx="5028480" cy="456480"/>
           </a:xfrm>
           <a:prstGeom prst="rect">
             <a:avLst/>
@@ -10249,6 +10896,11 @@
             <a:noAutofit/>
           </a:bodyPr>
           <a:p>
+            <a:pPr>
+              <a:lnSpc>
+                <a:spcPct val="100000"/>
+              </a:lnSpc>
+            </a:pPr>
             <a:endParaRPr b="0" lang="en-US" sz="1800" spc="-1" strike="noStrike">
               <a:solidFill>
                 <a:srgbClr val="ffffff"/>
@@ -10267,7 +10919,7 @@
         <p:spPr>
           <a:xfrm>
             <a:off x="438840" y="2030040"/>
-            <a:ext cx="4800240" cy="456840"/>
+            <a:ext cx="4799880" cy="456480"/>
           </a:xfrm>
           <a:prstGeom prst="rect">
             <a:avLst/>
@@ -10334,7 +10986,7 @@
         <p:spPr>
           <a:xfrm>
             <a:off x="457200" y="2578680"/>
-            <a:ext cx="4663080" cy="420120"/>
+            <a:ext cx="4662720" cy="419760"/>
           </a:xfrm>
           <a:prstGeom prst="rect">
             <a:avLst/>
@@ -10401,7 +11053,7 @@
         <p:spPr>
           <a:xfrm>
             <a:off x="457200" y="3035880"/>
-            <a:ext cx="4663080" cy="420120"/>
+            <a:ext cx="4662720" cy="419760"/>
           </a:xfrm>
           <a:prstGeom prst="rect">
             <a:avLst/>
@@ -10468,7 +11120,7 @@
         <p:spPr>
           <a:xfrm>
             <a:off x="457200" y="3493080"/>
-            <a:ext cx="4663080" cy="420120"/>
+            <a:ext cx="4662720" cy="419760"/>
           </a:xfrm>
           <a:prstGeom prst="rect">
             <a:avLst/>
@@ -10535,7 +11187,7 @@
         <p:spPr>
           <a:xfrm>
             <a:off x="457200" y="3950280"/>
-            <a:ext cx="4663080" cy="420120"/>
+            <a:ext cx="4662720" cy="419760"/>
           </a:xfrm>
           <a:prstGeom prst="rect">
             <a:avLst/>
@@ -10602,7 +11254,7 @@
         <p:spPr>
           <a:xfrm>
             <a:off x="457200" y="4407480"/>
-            <a:ext cx="4663080" cy="420120"/>
+            <a:ext cx="4662720" cy="419760"/>
           </a:xfrm>
           <a:prstGeom prst="rect">
             <a:avLst/>
@@ -10669,7 +11321,7 @@
         <p:spPr>
           <a:xfrm>
             <a:off x="5577840" y="2030040"/>
-            <a:ext cx="3273120" cy="1298160"/>
+            <a:ext cx="3272760" cy="1297800"/>
           </a:xfrm>
           <a:prstGeom prst="rect">
             <a:avLst/>
@@ -10695,6 +11347,11 @@
             <a:noAutofit/>
           </a:bodyPr>
           <a:p>
+            <a:pPr>
+              <a:lnSpc>
+                <a:spcPct val="100000"/>
+              </a:lnSpc>
+            </a:pPr>
             <a:endParaRPr b="0" lang="en-US" sz="1800" spc="-1" strike="noStrike">
               <a:solidFill>
                 <a:srgbClr val="ffffff"/>
@@ -10713,7 +11370,7 @@
         <p:spPr>
           <a:xfrm>
             <a:off x="5577840" y="2030040"/>
-            <a:ext cx="3273120" cy="420120"/>
+            <a:ext cx="3272760" cy="419760"/>
           </a:xfrm>
           <a:prstGeom prst="rect">
             <a:avLst/>
@@ -10739,6 +11396,11 @@
             <a:noAutofit/>
           </a:bodyPr>
           <a:p>
+            <a:pPr>
+              <a:lnSpc>
+                <a:spcPct val="100000"/>
+              </a:lnSpc>
+            </a:pPr>
             <a:endParaRPr b="0" lang="en-US" sz="1800" spc="-1" strike="noStrike">
               <a:solidFill>
                 <a:srgbClr val="ffffff"/>
@@ -10757,7 +11419,7 @@
         <p:spPr>
           <a:xfrm>
             <a:off x="5687640" y="2030040"/>
-            <a:ext cx="3053880" cy="420120"/>
+            <a:ext cx="3053520" cy="419760"/>
           </a:xfrm>
           <a:prstGeom prst="rect">
             <a:avLst/>
@@ -10814,7 +11476,7 @@
         <p:spPr>
           <a:xfrm>
             <a:off x="5687640" y="2523600"/>
-            <a:ext cx="3017160" cy="255600"/>
+            <a:ext cx="3016800" cy="255240"/>
           </a:xfrm>
           <a:prstGeom prst="rect">
             <a:avLst/>
@@ -10881,7 +11543,7 @@
         <p:spPr>
           <a:xfrm>
             <a:off x="5687640" y="2797920"/>
-            <a:ext cx="3017160" cy="255600"/>
+            <a:ext cx="3016800" cy="255240"/>
           </a:xfrm>
           <a:prstGeom prst="rect">
             <a:avLst/>
@@ -10958,7 +11620,7 @@
         <p:spPr>
           <a:xfrm>
             <a:off x="5687640" y="3072240"/>
-            <a:ext cx="3017160" cy="255600"/>
+            <a:ext cx="3016800" cy="255240"/>
           </a:xfrm>
           <a:prstGeom prst="rect">
             <a:avLst/>
@@ -11035,7 +11697,7 @@
         <p:spPr>
           <a:xfrm>
             <a:off x="5577840" y="3456360"/>
-            <a:ext cx="3273120" cy="1371240"/>
+            <a:ext cx="3272760" cy="1370880"/>
           </a:xfrm>
           <a:prstGeom prst="rect">
             <a:avLst/>
@@ -11061,6 +11723,11 @@
             <a:noAutofit/>
           </a:bodyPr>
           <a:p>
+            <a:pPr>
+              <a:lnSpc>
+                <a:spcPct val="100000"/>
+              </a:lnSpc>
+            </a:pPr>
             <a:endParaRPr b="0" lang="en-US" sz="1800" spc="-1" strike="noStrike">
               <a:solidFill>
                 <a:srgbClr val="ffffff"/>
@@ -11079,7 +11746,7 @@
         <p:spPr>
           <a:xfrm>
             <a:off x="5577840" y="3456360"/>
-            <a:ext cx="3273120" cy="420120"/>
+            <a:ext cx="3272760" cy="419760"/>
           </a:xfrm>
           <a:prstGeom prst="rect">
             <a:avLst/>
@@ -11105,6 +11772,11 @@
             <a:noAutofit/>
           </a:bodyPr>
           <a:p>
+            <a:pPr>
+              <a:lnSpc>
+                <a:spcPct val="100000"/>
+              </a:lnSpc>
+            </a:pPr>
             <a:endParaRPr b="0" lang="en-US" sz="1800" spc="-1" strike="noStrike">
               <a:solidFill>
                 <a:srgbClr val="ffffff"/>
@@ -11123,7 +11795,7 @@
         <p:spPr>
           <a:xfrm>
             <a:off x="5687640" y="3456360"/>
-            <a:ext cx="3053880" cy="420120"/>
+            <a:ext cx="3053520" cy="419760"/>
           </a:xfrm>
           <a:prstGeom prst="rect">
             <a:avLst/>
@@ -11180,7 +11852,7 @@
         <p:spPr>
           <a:xfrm>
             <a:off x="5687640" y="3931920"/>
-            <a:ext cx="3017160" cy="822600"/>
+            <a:ext cx="3016800" cy="822240"/>
           </a:xfrm>
           <a:prstGeom prst="rect">
             <a:avLst/>
@@ -11274,7 +11946,7 @@
         <p:spPr>
           <a:xfrm>
             <a:off x="0" y="0"/>
-            <a:ext cx="9143640" cy="959760"/>
+            <a:ext cx="9143280" cy="959400"/>
           </a:xfrm>
           <a:prstGeom prst="rect">
             <a:avLst/>
@@ -11300,6 +11972,11 @@
             <a:noAutofit/>
           </a:bodyPr>
           <a:p>
+            <a:pPr>
+              <a:lnSpc>
+                <a:spcPct val="100000"/>
+              </a:lnSpc>
+            </a:pPr>
             <a:endParaRPr b="0" lang="en-US" sz="1800" spc="-1" strike="noStrike">
               <a:solidFill>
                 <a:srgbClr val="ffffff"/>
@@ -11318,7 +11995,7 @@
         <p:spPr>
           <a:xfrm>
             <a:off x="0" y="960120"/>
-            <a:ext cx="9143640" cy="63720"/>
+            <a:ext cx="9143280" cy="63360"/>
           </a:xfrm>
           <a:prstGeom prst="rect">
             <a:avLst/>
@@ -11344,6 +12021,11 @@
             <a:noAutofit/>
           </a:bodyPr>
           <a:p>
+            <a:pPr>
+              <a:lnSpc>
+                <a:spcPct val="100000"/>
+              </a:lnSpc>
+            </a:pPr>
             <a:endParaRPr b="0" lang="en-US" sz="1800" spc="-1" strike="noStrike">
               <a:solidFill>
                 <a:srgbClr val="ffffff"/>
@@ -11362,7 +12044,7 @@
         <p:spPr>
           <a:xfrm>
             <a:off x="411480" y="0"/>
-            <a:ext cx="8320680" cy="959760"/>
+            <a:ext cx="8320320" cy="959400"/>
           </a:xfrm>
           <a:prstGeom prst="rect">
             <a:avLst/>
@@ -11419,7 +12101,7 @@
         <p:spPr>
           <a:xfrm>
             <a:off x="365760" y="1170360"/>
-            <a:ext cx="8412120" cy="804240"/>
+            <a:ext cx="8411760" cy="803880"/>
           </a:xfrm>
           <a:prstGeom prst="rect">
             <a:avLst/>
@@ -11445,6 +12127,11 @@
             <a:noAutofit/>
           </a:bodyPr>
           <a:p>
+            <a:pPr>
+              <a:lnSpc>
+                <a:spcPct val="100000"/>
+              </a:lnSpc>
+            </a:pPr>
             <a:endParaRPr b="0" lang="en-US" sz="1800" spc="-1" strike="noStrike">
               <a:solidFill>
                 <a:srgbClr val="ffffff"/>
@@ -11463,7 +12150,7 @@
         <p:spPr>
           <a:xfrm>
             <a:off x="530280" y="1188720"/>
-            <a:ext cx="8137800" cy="749520"/>
+            <a:ext cx="8137440" cy="749160"/>
           </a:xfrm>
           <a:prstGeom prst="rect">
             <a:avLst/>
@@ -11550,7 +12237,7 @@
         <p:spPr>
           <a:xfrm>
             <a:off x="365760" y="2103120"/>
-            <a:ext cx="4132800" cy="2788560"/>
+            <a:ext cx="4132440" cy="2788200"/>
           </a:xfrm>
           <a:prstGeom prst="rect">
             <a:avLst/>
@@ -11583,6 +12270,11 @@
             <a:noAutofit/>
           </a:bodyPr>
           <a:p>
+            <a:pPr>
+              <a:lnSpc>
+                <a:spcPct val="100000"/>
+              </a:lnSpc>
+            </a:pPr>
             <a:endParaRPr b="0" lang="en-US" sz="1800" spc="-1" strike="noStrike">
               <a:solidFill>
                 <a:srgbClr val="ffffff"/>
@@ -11601,7 +12293,7 @@
         <p:spPr>
           <a:xfrm>
             <a:off x="365760" y="2103120"/>
-            <a:ext cx="4132800" cy="456840"/>
+            <a:ext cx="4132440" cy="456480"/>
           </a:xfrm>
           <a:prstGeom prst="rect">
             <a:avLst/>
@@ -11627,6 +12319,11 @@
             <a:noAutofit/>
           </a:bodyPr>
           <a:p>
+            <a:pPr>
+              <a:lnSpc>
+                <a:spcPct val="100000"/>
+              </a:lnSpc>
+            </a:pPr>
             <a:endParaRPr b="0" lang="en-US" sz="1800" spc="-1" strike="noStrike">
               <a:solidFill>
                 <a:srgbClr val="ffffff"/>
@@ -11645,7 +12342,7 @@
         <p:spPr>
           <a:xfrm>
             <a:off x="475560" y="2103120"/>
-            <a:ext cx="3894840" cy="456840"/>
+            <a:ext cx="3894480" cy="456480"/>
           </a:xfrm>
           <a:prstGeom prst="rect">
             <a:avLst/>
@@ -11702,7 +12399,7 @@
         <p:spPr>
           <a:xfrm>
             <a:off x="475560" y="2633400"/>
-            <a:ext cx="3858480" cy="585000"/>
+            <a:ext cx="3858120" cy="584640"/>
           </a:xfrm>
           <a:prstGeom prst="rect">
             <a:avLst/>
@@ -11759,7 +12456,7 @@
         <p:spPr>
           <a:xfrm>
             <a:off x="475560" y="3255120"/>
-            <a:ext cx="3858480" cy="402120"/>
+            <a:ext cx="3858120" cy="401760"/>
           </a:xfrm>
           <a:prstGeom prst="rect">
             <a:avLst/>
@@ -11826,7 +12523,7 @@
         <p:spPr>
           <a:xfrm>
             <a:off x="475560" y="3694320"/>
-            <a:ext cx="3858480" cy="402120"/>
+            <a:ext cx="3858120" cy="401760"/>
           </a:xfrm>
           <a:prstGeom prst="rect">
             <a:avLst/>
@@ -11893,7 +12590,7 @@
         <p:spPr>
           <a:xfrm>
             <a:off x="475560" y="4133160"/>
-            <a:ext cx="3858480" cy="402120"/>
+            <a:ext cx="3858120" cy="401760"/>
           </a:xfrm>
           <a:prstGeom prst="rect">
             <a:avLst/>
@@ -11960,7 +12657,7 @@
         <p:spPr>
           <a:xfrm>
             <a:off x="475560" y="4572000"/>
-            <a:ext cx="3858480" cy="255600"/>
+            <a:ext cx="3858120" cy="255240"/>
           </a:xfrm>
           <a:prstGeom prst="rect">
             <a:avLst/>
@@ -12027,7 +12724,7 @@
         <p:spPr>
           <a:xfrm>
             <a:off x="4645080" y="2103120"/>
-            <a:ext cx="4132800" cy="2788560"/>
+            <a:ext cx="4132440" cy="2788200"/>
           </a:xfrm>
           <a:prstGeom prst="rect">
             <a:avLst/>
@@ -12060,6 +12757,11 @@
             <a:noAutofit/>
           </a:bodyPr>
           <a:p>
+            <a:pPr>
+              <a:lnSpc>
+                <a:spcPct val="100000"/>
+              </a:lnSpc>
+            </a:pPr>
             <a:endParaRPr b="0" lang="en-US" sz="1800" spc="-1" strike="noStrike">
               <a:solidFill>
                 <a:srgbClr val="ffffff"/>
@@ -12078,7 +12780,7 @@
         <p:spPr>
           <a:xfrm>
             <a:off x="4645080" y="2103120"/>
-            <a:ext cx="4132800" cy="456840"/>
+            <a:ext cx="4132440" cy="456480"/>
           </a:xfrm>
           <a:prstGeom prst="rect">
             <a:avLst/>
@@ -12104,6 +12806,11 @@
             <a:noAutofit/>
           </a:bodyPr>
           <a:p>
+            <a:pPr>
+              <a:lnSpc>
+                <a:spcPct val="100000"/>
+              </a:lnSpc>
+            </a:pPr>
             <a:endParaRPr b="0" lang="en-US" sz="1800" spc="-1" strike="noStrike">
               <a:solidFill>
                 <a:srgbClr val="ffffff"/>
@@ -12122,7 +12829,7 @@
         <p:spPr>
           <a:xfrm>
             <a:off x="4754880" y="2103120"/>
-            <a:ext cx="3894840" cy="456840"/>
+            <a:ext cx="3894480" cy="456480"/>
           </a:xfrm>
           <a:prstGeom prst="rect">
             <a:avLst/>
@@ -12179,7 +12886,7 @@
         <p:spPr>
           <a:xfrm>
             <a:off x="4754880" y="2633400"/>
-            <a:ext cx="3894840" cy="402120"/>
+            <a:ext cx="3894480" cy="401760"/>
           </a:xfrm>
           <a:prstGeom prst="rect">
             <a:avLst/>
@@ -12246,7 +12953,7 @@
         <p:spPr>
           <a:xfrm>
             <a:off x="4754880" y="3072240"/>
-            <a:ext cx="3894840" cy="402120"/>
+            <a:ext cx="3894480" cy="401760"/>
           </a:xfrm>
           <a:prstGeom prst="rect">
             <a:avLst/>
@@ -12313,7 +13020,7 @@
         <p:spPr>
           <a:xfrm>
             <a:off x="4754880" y="3511440"/>
-            <a:ext cx="3894840" cy="402120"/>
+            <a:ext cx="3894480" cy="401760"/>
           </a:xfrm>
           <a:prstGeom prst="rect">
             <a:avLst/>
@@ -12380,7 +13087,7 @@
         <p:spPr>
           <a:xfrm>
             <a:off x="4754880" y="3950280"/>
-            <a:ext cx="3894840" cy="402120"/>
+            <a:ext cx="3894480" cy="401760"/>
           </a:xfrm>
           <a:prstGeom prst="rect">
             <a:avLst/>
@@ -12447,7 +13154,7 @@
         <p:spPr>
           <a:xfrm>
             <a:off x="4754880" y="4389120"/>
-            <a:ext cx="3894840" cy="402120"/>
+            <a:ext cx="3894480" cy="401760"/>
           </a:xfrm>
           <a:prstGeom prst="rect">
             <a:avLst/>
@@ -12551,7 +13258,7 @@
         <p:spPr>
           <a:xfrm>
             <a:off x="0" y="0"/>
-            <a:ext cx="9143640" cy="914040"/>
+            <a:ext cx="9143280" cy="913680"/>
           </a:xfrm>
           <a:prstGeom prst="rect">
             <a:avLst/>
@@ -12577,6 +13284,11 @@
             <a:noAutofit/>
           </a:bodyPr>
           <a:p>
+            <a:pPr>
+              <a:lnSpc>
+                <a:spcPct val="100000"/>
+              </a:lnSpc>
+            </a:pPr>
             <a:endParaRPr b="0" lang="en-US" sz="1800" spc="-1" strike="noStrike">
               <a:solidFill>
                 <a:srgbClr val="ffffff"/>
@@ -12595,7 +13307,7 @@
         <p:spPr>
           <a:xfrm>
             <a:off x="0" y="914400"/>
-            <a:ext cx="9143640" cy="54360"/>
+            <a:ext cx="9143280" cy="54000"/>
           </a:xfrm>
           <a:prstGeom prst="rect">
             <a:avLst/>
@@ -12621,6 +13333,11 @@
             <a:noAutofit/>
           </a:bodyPr>
           <a:p>
+            <a:pPr>
+              <a:lnSpc>
+                <a:spcPct val="100000"/>
+              </a:lnSpc>
+            </a:pPr>
             <a:endParaRPr b="0" lang="en-US" sz="1800" spc="-1" strike="noStrike">
               <a:solidFill>
                 <a:srgbClr val="ffffff"/>
@@ -12639,7 +13356,7 @@
         <p:spPr>
           <a:xfrm>
             <a:off x="411480" y="0"/>
-            <a:ext cx="8320680" cy="914040"/>
+            <a:ext cx="8320320" cy="913680"/>
           </a:xfrm>
           <a:prstGeom prst="rect">
             <a:avLst/>
@@ -12695,7 +13412,7 @@
         </p:nvGraphicFramePr>
         <p:xfrm>
           <a:off x="320040" y="1051560"/>
-          <a:ext cx="8503560" cy="3931560"/>
+          <a:ext cx="8503560" cy="3931200"/>
         </p:xfrm>
         <a:graphic>
           <a:graphicData uri="http://schemas.openxmlformats.org/drawingml/2006/table">
@@ -14257,7 +14974,7 @@
         <p:spPr>
           <a:xfrm>
             <a:off x="0" y="0"/>
-            <a:ext cx="9143640" cy="959760"/>
+            <a:ext cx="9143280" cy="959400"/>
           </a:xfrm>
           <a:prstGeom prst="rect">
             <a:avLst/>
@@ -14283,6 +15000,11 @@
             <a:noAutofit/>
           </a:bodyPr>
           <a:p>
+            <a:pPr>
+              <a:lnSpc>
+                <a:spcPct val="100000"/>
+              </a:lnSpc>
+            </a:pPr>
             <a:endParaRPr b="0" lang="en-US" sz="1800" spc="-1" strike="noStrike">
               <a:solidFill>
                 <a:srgbClr val="ffffff"/>
@@ -14301,7 +15023,7 @@
         <p:spPr>
           <a:xfrm>
             <a:off x="0" y="960120"/>
-            <a:ext cx="9143640" cy="63720"/>
+            <a:ext cx="9143280" cy="63360"/>
           </a:xfrm>
           <a:prstGeom prst="rect">
             <a:avLst/>
@@ -14327,6 +15049,11 @@
             <a:noAutofit/>
           </a:bodyPr>
           <a:p>
+            <a:pPr>
+              <a:lnSpc>
+                <a:spcPct val="100000"/>
+              </a:lnSpc>
+            </a:pPr>
             <a:endParaRPr b="0" lang="en-US" sz="1800" spc="-1" strike="noStrike">
               <a:solidFill>
                 <a:srgbClr val="ffffff"/>
@@ -14345,7 +15072,7 @@
         <p:spPr>
           <a:xfrm>
             <a:off x="411480" y="0"/>
-            <a:ext cx="8320680" cy="959760"/>
+            <a:ext cx="8320320" cy="959400"/>
           </a:xfrm>
           <a:prstGeom prst="rect">
             <a:avLst/>
@@ -14402,7 +15129,7 @@
         <p:spPr>
           <a:xfrm>
             <a:off x="347400" y="1170360"/>
-            <a:ext cx="2029680" cy="2633040"/>
+            <a:ext cx="2029320" cy="2632680"/>
           </a:xfrm>
           <a:prstGeom prst="rect">
             <a:avLst/>
@@ -14435,6 +15162,11 @@
             <a:noAutofit/>
           </a:bodyPr>
           <a:p>
+            <a:pPr>
+              <a:lnSpc>
+                <a:spcPct val="100000"/>
+              </a:lnSpc>
+            </a:pPr>
             <a:endParaRPr b="0" lang="en-US" sz="1800" spc="-1" strike="noStrike">
               <a:solidFill>
                 <a:srgbClr val="ffffff"/>
@@ -14453,7 +15185,7 @@
         <p:spPr>
           <a:xfrm>
             <a:off x="347400" y="1170360"/>
-            <a:ext cx="2029680" cy="456840"/>
+            <a:ext cx="2029320" cy="456480"/>
           </a:xfrm>
           <a:prstGeom prst="rect">
             <a:avLst/>
@@ -14479,6 +15211,11 @@
             <a:noAutofit/>
           </a:bodyPr>
           <a:p>
+            <a:pPr>
+              <a:lnSpc>
+                <a:spcPct val="100000"/>
+              </a:lnSpc>
+            </a:pPr>
             <a:endParaRPr b="0" lang="en-US" sz="1800" spc="-1" strike="noStrike">
               <a:solidFill>
                 <a:srgbClr val="ffffff"/>
@@ -14497,7 +15234,7 @@
         <p:spPr>
           <a:xfrm>
             <a:off x="347400" y="1170360"/>
-            <a:ext cx="456840" cy="456840"/>
+            <a:ext cx="456480" cy="456480"/>
           </a:xfrm>
           <a:prstGeom prst="rect">
             <a:avLst/>
@@ -14553,7 +15290,7 @@
         <p:spPr>
           <a:xfrm>
             <a:off x="457200" y="1170360"/>
-            <a:ext cx="1554120" cy="456840"/>
+            <a:ext cx="1553760" cy="456480"/>
           </a:xfrm>
           <a:prstGeom prst="rect">
             <a:avLst/>
@@ -14609,7 +15346,7 @@
         <p:spPr>
           <a:xfrm>
             <a:off x="420480" y="1682640"/>
-            <a:ext cx="1883160" cy="475200"/>
+            <a:ext cx="1882800" cy="474840"/>
           </a:xfrm>
           <a:prstGeom prst="rect">
             <a:avLst/>
@@ -14692,7 +15429,7 @@
         <p:spPr>
           <a:xfrm>
             <a:off x="438840" y="2194560"/>
-            <a:ext cx="1846800" cy="1508400"/>
+            <a:ext cx="1846440" cy="1508040"/>
           </a:xfrm>
           <a:prstGeom prst="rect">
             <a:avLst/>
@@ -14749,7 +15486,7 @@
         <p:spPr>
           <a:xfrm>
             <a:off x="2377440" y="1700640"/>
-            <a:ext cx="136800" cy="319680"/>
+            <a:ext cx="136440" cy="319320"/>
           </a:xfrm>
           <a:prstGeom prst="rect">
             <a:avLst/>
@@ -14775,6 +15512,11 @@
             <a:noAutofit/>
           </a:bodyPr>
           <a:p>
+            <a:pPr>
+              <a:lnSpc>
+                <a:spcPct val="100000"/>
+              </a:lnSpc>
+            </a:pPr>
             <a:endParaRPr b="0" lang="en-US" sz="1800" spc="-1" strike="noStrike">
               <a:solidFill>
                 <a:srgbClr val="000000"/>
@@ -14793,7 +15535,7 @@
         <p:spPr>
           <a:xfrm>
             <a:off x="2514600" y="1170360"/>
-            <a:ext cx="2029680" cy="2633040"/>
+            <a:ext cx="2029320" cy="2632680"/>
           </a:xfrm>
           <a:prstGeom prst="rect">
             <a:avLst/>
@@ -14826,6 +15568,11 @@
             <a:noAutofit/>
           </a:bodyPr>
           <a:p>
+            <a:pPr>
+              <a:lnSpc>
+                <a:spcPct val="100000"/>
+              </a:lnSpc>
+            </a:pPr>
             <a:endParaRPr b="0" lang="en-US" sz="1800" spc="-1" strike="noStrike">
               <a:solidFill>
                 <a:srgbClr val="ffffff"/>
@@ -14844,7 +15591,7 @@
         <p:spPr>
           <a:xfrm>
             <a:off x="2514600" y="1170360"/>
-            <a:ext cx="2029680" cy="456840"/>
+            <a:ext cx="2029320" cy="456480"/>
           </a:xfrm>
           <a:prstGeom prst="rect">
             <a:avLst/>
@@ -14870,6 +15617,11 @@
             <a:noAutofit/>
           </a:bodyPr>
           <a:p>
+            <a:pPr>
+              <a:lnSpc>
+                <a:spcPct val="100000"/>
+              </a:lnSpc>
+            </a:pPr>
             <a:endParaRPr b="0" lang="en-US" sz="1800" spc="-1" strike="noStrike">
               <a:solidFill>
                 <a:srgbClr val="ffffff"/>
@@ -14888,7 +15640,7 @@
         <p:spPr>
           <a:xfrm>
             <a:off x="2514600" y="1170360"/>
-            <a:ext cx="456840" cy="456840"/>
+            <a:ext cx="456480" cy="456480"/>
           </a:xfrm>
           <a:prstGeom prst="rect">
             <a:avLst/>
@@ -14944,7 +15696,7 @@
         <p:spPr>
           <a:xfrm>
             <a:off x="2624400" y="1170360"/>
-            <a:ext cx="1554120" cy="456840"/>
+            <a:ext cx="1553760" cy="456480"/>
           </a:xfrm>
           <a:prstGeom prst="rect">
             <a:avLst/>
@@ -15000,7 +15752,7 @@
         <p:spPr>
           <a:xfrm>
             <a:off x="2587680" y="1682640"/>
-            <a:ext cx="1883160" cy="475200"/>
+            <a:ext cx="1882800" cy="474840"/>
           </a:xfrm>
           <a:prstGeom prst="rect">
             <a:avLst/>
@@ -15083,7 +15835,7 @@
         <p:spPr>
           <a:xfrm>
             <a:off x="2606040" y="2194560"/>
-            <a:ext cx="1846800" cy="1508400"/>
+            <a:ext cx="1846440" cy="1508040"/>
           </a:xfrm>
           <a:prstGeom prst="rect">
             <a:avLst/>
@@ -15140,7 +15892,7 @@
         <p:spPr>
           <a:xfrm>
             <a:off x="4544640" y="1700640"/>
-            <a:ext cx="136800" cy="319680"/>
+            <a:ext cx="136440" cy="319320"/>
           </a:xfrm>
           <a:prstGeom prst="rect">
             <a:avLst/>
@@ -15166,6 +15918,11 @@
             <a:noAutofit/>
           </a:bodyPr>
           <a:p>
+            <a:pPr>
+              <a:lnSpc>
+                <a:spcPct val="100000"/>
+              </a:lnSpc>
+            </a:pPr>
             <a:endParaRPr b="0" lang="en-US" sz="1800" spc="-1" strike="noStrike">
               <a:solidFill>
                 <a:srgbClr val="000000"/>
@@ -15184,7 +15941,7 @@
         <p:spPr>
           <a:xfrm>
             <a:off x="4681800" y="1170360"/>
-            <a:ext cx="2029680" cy="2633040"/>
+            <a:ext cx="2029320" cy="2632680"/>
           </a:xfrm>
           <a:prstGeom prst="rect">
             <a:avLst/>
@@ -15217,6 +15974,11 @@
             <a:noAutofit/>
           </a:bodyPr>
           <a:p>
+            <a:pPr>
+              <a:lnSpc>
+                <a:spcPct val="100000"/>
+              </a:lnSpc>
+            </a:pPr>
             <a:endParaRPr b="0" lang="en-US" sz="1800" spc="-1" strike="noStrike">
               <a:solidFill>
                 <a:srgbClr val="ffffff"/>
@@ -15235,7 +15997,7 @@
         <p:spPr>
           <a:xfrm>
             <a:off x="4681800" y="1170360"/>
-            <a:ext cx="2029680" cy="456840"/>
+            <a:ext cx="2029320" cy="456480"/>
           </a:xfrm>
           <a:prstGeom prst="rect">
             <a:avLst/>
@@ -15261,6 +16023,11 @@
             <a:noAutofit/>
           </a:bodyPr>
           <a:p>
+            <a:pPr>
+              <a:lnSpc>
+                <a:spcPct val="100000"/>
+              </a:lnSpc>
+            </a:pPr>
             <a:endParaRPr b="0" lang="en-US" sz="1800" spc="-1" strike="noStrike">
               <a:solidFill>
                 <a:srgbClr val="ffffff"/>
@@ -15279,7 +16046,7 @@
         <p:spPr>
           <a:xfrm>
             <a:off x="4681800" y="1170360"/>
-            <a:ext cx="456840" cy="456840"/>
+            <a:ext cx="456480" cy="456480"/>
           </a:xfrm>
           <a:prstGeom prst="rect">
             <a:avLst/>
@@ -15335,7 +16102,7 @@
         <p:spPr>
           <a:xfrm>
             <a:off x="4791600" y="1170360"/>
-            <a:ext cx="1554120" cy="456840"/>
+            <a:ext cx="1553760" cy="456480"/>
           </a:xfrm>
           <a:prstGeom prst="rect">
             <a:avLst/>
@@ -15391,7 +16158,7 @@
         <p:spPr>
           <a:xfrm>
             <a:off x="4754880" y="1682640"/>
-            <a:ext cx="1883160" cy="475200"/>
+            <a:ext cx="1882800" cy="474840"/>
           </a:xfrm>
           <a:prstGeom prst="rect">
             <a:avLst/>
@@ -15474,7 +16241,7 @@
         <p:spPr>
           <a:xfrm>
             <a:off x="4773240" y="2194560"/>
-            <a:ext cx="1846800" cy="1508400"/>
+            <a:ext cx="1846440" cy="1508040"/>
           </a:xfrm>
           <a:prstGeom prst="rect">
             <a:avLst/>
@@ -15531,7 +16298,7 @@
         <p:spPr>
           <a:xfrm>
             <a:off x="6711840" y="1700640"/>
-            <a:ext cx="136800" cy="319680"/>
+            <a:ext cx="136440" cy="319320"/>
           </a:xfrm>
           <a:prstGeom prst="rect">
             <a:avLst/>
@@ -15557,6 +16324,11 @@
             <a:noAutofit/>
           </a:bodyPr>
           <a:p>
+            <a:pPr>
+              <a:lnSpc>
+                <a:spcPct val="100000"/>
+              </a:lnSpc>
+            </a:pPr>
             <a:endParaRPr b="0" lang="en-US" sz="1800" spc="-1" strike="noStrike">
               <a:solidFill>
                 <a:srgbClr val="000000"/>
@@ -15575,7 +16347,7 @@
         <p:spPr>
           <a:xfrm>
             <a:off x="6849000" y="1170360"/>
-            <a:ext cx="2029680" cy="2633040"/>
+            <a:ext cx="2029320" cy="2632680"/>
           </a:xfrm>
           <a:prstGeom prst="rect">
             <a:avLst/>
@@ -15608,6 +16380,11 @@
             <a:noAutofit/>
           </a:bodyPr>
           <a:p>
+            <a:pPr>
+              <a:lnSpc>
+                <a:spcPct val="100000"/>
+              </a:lnSpc>
+            </a:pPr>
             <a:endParaRPr b="0" lang="en-US" sz="1800" spc="-1" strike="noStrike">
               <a:solidFill>
                 <a:srgbClr val="ffffff"/>
@@ -15626,7 +16403,7 @@
         <p:spPr>
           <a:xfrm>
             <a:off x="6849000" y="1170360"/>
-            <a:ext cx="2029680" cy="456840"/>
+            <a:ext cx="2029320" cy="456480"/>
           </a:xfrm>
           <a:prstGeom prst="rect">
             <a:avLst/>
@@ -15652,6 +16429,11 @@
             <a:noAutofit/>
           </a:bodyPr>
           <a:p>
+            <a:pPr>
+              <a:lnSpc>
+                <a:spcPct val="100000"/>
+              </a:lnSpc>
+            </a:pPr>
             <a:endParaRPr b="0" lang="en-US" sz="1800" spc="-1" strike="noStrike">
               <a:solidFill>
                 <a:srgbClr val="ffffff"/>
@@ -15670,7 +16452,7 @@
         <p:spPr>
           <a:xfrm>
             <a:off x="6849000" y="1170360"/>
-            <a:ext cx="456840" cy="456840"/>
+            <a:ext cx="456480" cy="456480"/>
           </a:xfrm>
           <a:prstGeom prst="rect">
             <a:avLst/>
@@ -15726,7 +16508,7 @@
         <p:spPr>
           <a:xfrm>
             <a:off x="6958440" y="1170360"/>
-            <a:ext cx="1554120" cy="456840"/>
+            <a:ext cx="1553760" cy="456480"/>
           </a:xfrm>
           <a:prstGeom prst="rect">
             <a:avLst/>
@@ -15782,7 +16564,7 @@
         <p:spPr>
           <a:xfrm>
             <a:off x="6922080" y="1682640"/>
-            <a:ext cx="1883160" cy="475200"/>
+            <a:ext cx="1882800" cy="474840"/>
           </a:xfrm>
           <a:prstGeom prst="rect">
             <a:avLst/>
@@ -15865,7 +16647,7 @@
         <p:spPr>
           <a:xfrm>
             <a:off x="6940440" y="2194560"/>
-            <a:ext cx="1846800" cy="1508400"/>
+            <a:ext cx="1846440" cy="1508040"/>
           </a:xfrm>
           <a:prstGeom prst="rect">
             <a:avLst/>
@@ -15922,7 +16704,7 @@
         <p:spPr>
           <a:xfrm>
             <a:off x="347400" y="3931920"/>
-            <a:ext cx="8457840" cy="1005480"/>
+            <a:ext cx="8457480" cy="1005120"/>
           </a:xfrm>
           <a:prstGeom prst="rect">
             <a:avLst/>
@@ -15955,6 +16737,11 @@
             <a:noAutofit/>
           </a:bodyPr>
           <a:p>
+            <a:pPr>
+              <a:lnSpc>
+                <a:spcPct val="100000"/>
+              </a:lnSpc>
+            </a:pPr>
             <a:endParaRPr b="0" lang="en-US" sz="1800" spc="-1" strike="noStrike">
               <a:solidFill>
                 <a:srgbClr val="ffffff"/>
@@ -15973,7 +16760,7 @@
         <p:spPr>
           <a:xfrm>
             <a:off x="475560" y="3950280"/>
-            <a:ext cx="8229240" cy="328680"/>
+            <a:ext cx="8228880" cy="328320"/>
           </a:xfrm>
           <a:prstGeom prst="rect">
             <a:avLst/>
@@ -16030,7 +16817,7 @@
         <p:spPr>
           <a:xfrm>
             <a:off x="475560" y="4316040"/>
-            <a:ext cx="987120" cy="502560"/>
+            <a:ext cx="986760" cy="502200"/>
           </a:xfrm>
           <a:prstGeom prst="rect">
             <a:avLst/>
@@ -16056,6 +16843,11 @@
             <a:noAutofit/>
           </a:bodyPr>
           <a:p>
+            <a:pPr>
+              <a:lnSpc>
+                <a:spcPct val="100000"/>
+              </a:lnSpc>
+            </a:pPr>
             <a:endParaRPr b="0" lang="en-US" sz="1800" spc="-1" strike="noStrike">
               <a:solidFill>
                 <a:srgbClr val="ffffff"/>
@@ -16074,7 +16866,7 @@
         <p:spPr>
           <a:xfrm>
             <a:off x="475560" y="4316040"/>
-            <a:ext cx="987120" cy="502560"/>
+            <a:ext cx="986760" cy="502200"/>
           </a:xfrm>
           <a:prstGeom prst="rect">
             <a:avLst/>
@@ -16131,7 +16923,7 @@
         <p:spPr>
           <a:xfrm>
             <a:off x="1527120" y="4316040"/>
-            <a:ext cx="987120" cy="502560"/>
+            <a:ext cx="986760" cy="502200"/>
           </a:xfrm>
           <a:prstGeom prst="rect">
             <a:avLst/>
@@ -16157,6 +16949,11 @@
             <a:noAutofit/>
           </a:bodyPr>
           <a:p>
+            <a:pPr>
+              <a:lnSpc>
+                <a:spcPct val="100000"/>
+              </a:lnSpc>
+            </a:pPr>
             <a:endParaRPr b="0" lang="en-US" sz="1800" spc="-1" strike="noStrike">
               <a:solidFill>
                 <a:srgbClr val="ffffff"/>
@@ -16175,7 +16972,7 @@
         <p:spPr>
           <a:xfrm>
             <a:off x="1527120" y="4316040"/>
-            <a:ext cx="987120" cy="502560"/>
+            <a:ext cx="986760" cy="502200"/>
           </a:xfrm>
           <a:prstGeom prst="rect">
             <a:avLst/>
@@ -16232,7 +17029,7 @@
         <p:spPr>
           <a:xfrm>
             <a:off x="2578680" y="4316040"/>
-            <a:ext cx="987120" cy="502560"/>
+            <a:ext cx="986760" cy="502200"/>
           </a:xfrm>
           <a:prstGeom prst="rect">
             <a:avLst/>
@@ -16258,6 +17055,11 @@
             <a:noAutofit/>
           </a:bodyPr>
           <a:p>
+            <a:pPr>
+              <a:lnSpc>
+                <a:spcPct val="100000"/>
+              </a:lnSpc>
+            </a:pPr>
             <a:endParaRPr b="0" lang="en-US" sz="1800" spc="-1" strike="noStrike">
               <a:solidFill>
                 <a:srgbClr val="ffffff"/>
@@ -16276,7 +17078,7 @@
         <p:spPr>
           <a:xfrm>
             <a:off x="2578680" y="4316040"/>
-            <a:ext cx="987120" cy="502560"/>
+            <a:ext cx="986760" cy="502200"/>
           </a:xfrm>
           <a:prstGeom prst="rect">
             <a:avLst/>
@@ -16333,7 +17135,7 @@
         <p:spPr>
           <a:xfrm>
             <a:off x="3630240" y="4316040"/>
-            <a:ext cx="987120" cy="502560"/>
+            <a:ext cx="986760" cy="502200"/>
           </a:xfrm>
           <a:prstGeom prst="rect">
             <a:avLst/>
@@ -16359,6 +17161,11 @@
             <a:noAutofit/>
           </a:bodyPr>
           <a:p>
+            <a:pPr>
+              <a:lnSpc>
+                <a:spcPct val="100000"/>
+              </a:lnSpc>
+            </a:pPr>
             <a:endParaRPr b="0" lang="en-US" sz="1800" spc="-1" strike="noStrike">
               <a:solidFill>
                 <a:srgbClr val="ffffff"/>
@@ -16377,7 +17184,7 @@
         <p:spPr>
           <a:xfrm>
             <a:off x="3630240" y="4316040"/>
-            <a:ext cx="987120" cy="502560"/>
+            <a:ext cx="986760" cy="502200"/>
           </a:xfrm>
           <a:prstGeom prst="rect">
             <a:avLst/>
@@ -16434,7 +17241,7 @@
         <p:spPr>
           <a:xfrm>
             <a:off x="4681800" y="4316040"/>
-            <a:ext cx="987120" cy="502560"/>
+            <a:ext cx="986760" cy="502200"/>
           </a:xfrm>
           <a:prstGeom prst="rect">
             <a:avLst/>
@@ -16460,6 +17267,11 @@
             <a:noAutofit/>
           </a:bodyPr>
           <a:p>
+            <a:pPr>
+              <a:lnSpc>
+                <a:spcPct val="100000"/>
+              </a:lnSpc>
+            </a:pPr>
             <a:endParaRPr b="0" lang="en-US" sz="1800" spc="-1" strike="noStrike">
               <a:solidFill>
                 <a:srgbClr val="ffffff"/>
@@ -16478,7 +17290,7 @@
         <p:spPr>
           <a:xfrm>
             <a:off x="4681800" y="4316040"/>
-            <a:ext cx="987120" cy="502560"/>
+            <a:ext cx="986760" cy="502200"/>
           </a:xfrm>
           <a:prstGeom prst="rect">
             <a:avLst/>
@@ -16535,7 +17347,7 @@
         <p:spPr>
           <a:xfrm>
             <a:off x="5733360" y="4316040"/>
-            <a:ext cx="987120" cy="502560"/>
+            <a:ext cx="986760" cy="502200"/>
           </a:xfrm>
           <a:prstGeom prst="rect">
             <a:avLst/>
@@ -16561,6 +17373,11 @@
             <a:noAutofit/>
           </a:bodyPr>
           <a:p>
+            <a:pPr>
+              <a:lnSpc>
+                <a:spcPct val="100000"/>
+              </a:lnSpc>
+            </a:pPr>
             <a:endParaRPr b="0" lang="en-US" sz="1800" spc="-1" strike="noStrike">
               <a:solidFill>
                 <a:srgbClr val="ffffff"/>
@@ -16579,7 +17396,7 @@
         <p:spPr>
           <a:xfrm>
             <a:off x="5733360" y="4316040"/>
-            <a:ext cx="987120" cy="502560"/>
+            <a:ext cx="986760" cy="502200"/>
           </a:xfrm>
           <a:prstGeom prst="rect">
             <a:avLst/>
@@ -16636,7 +17453,7 @@
         <p:spPr>
           <a:xfrm>
             <a:off x="6784920" y="4316040"/>
-            <a:ext cx="987120" cy="502560"/>
+            <a:ext cx="986760" cy="502200"/>
           </a:xfrm>
           <a:prstGeom prst="rect">
             <a:avLst/>
@@ -16662,6 +17479,11 @@
             <a:noAutofit/>
           </a:bodyPr>
           <a:p>
+            <a:pPr>
+              <a:lnSpc>
+                <a:spcPct val="100000"/>
+              </a:lnSpc>
+            </a:pPr>
             <a:endParaRPr b="0" lang="en-US" sz="1800" spc="-1" strike="noStrike">
               <a:solidFill>
                 <a:srgbClr val="ffffff"/>
@@ -16680,7 +17502,7 @@
         <p:spPr>
           <a:xfrm>
             <a:off x="6784920" y="4316040"/>
-            <a:ext cx="987120" cy="502560"/>
+            <a:ext cx="986760" cy="502200"/>
           </a:xfrm>
           <a:prstGeom prst="rect">
             <a:avLst/>
@@ -16737,7 +17559,7 @@
         <p:spPr>
           <a:xfrm>
             <a:off x="7836480" y="4316040"/>
-            <a:ext cx="987120" cy="502560"/>
+            <a:ext cx="986760" cy="502200"/>
           </a:xfrm>
           <a:prstGeom prst="rect">
             <a:avLst/>
@@ -16763,6 +17585,11 @@
             <a:noAutofit/>
           </a:bodyPr>
           <a:p>
+            <a:pPr>
+              <a:lnSpc>
+                <a:spcPct val="100000"/>
+              </a:lnSpc>
+            </a:pPr>
             <a:endParaRPr b="0" lang="en-US" sz="1800" spc="-1" strike="noStrike">
               <a:solidFill>
                 <a:srgbClr val="ffffff"/>
@@ -16781,7 +17608,7 @@
         <p:spPr>
           <a:xfrm>
             <a:off x="7836480" y="4316040"/>
-            <a:ext cx="987120" cy="502560"/>
+            <a:ext cx="986760" cy="502200"/>
           </a:xfrm>
           <a:prstGeom prst="rect">
             <a:avLst/>
@@ -16875,7 +17702,7 @@
         <p:spPr>
           <a:xfrm>
             <a:off x="0" y="0"/>
-            <a:ext cx="9143640" cy="914040"/>
+            <a:ext cx="9143280" cy="913680"/>
           </a:xfrm>
           <a:prstGeom prst="rect">
             <a:avLst/>
@@ -16901,6 +17728,11 @@
             <a:noAutofit/>
           </a:bodyPr>
           <a:p>
+            <a:pPr>
+              <a:lnSpc>
+                <a:spcPct val="100000"/>
+              </a:lnSpc>
+            </a:pPr>
             <a:endParaRPr b="0" lang="en-US" sz="1800" spc="-1" strike="noStrike">
               <a:solidFill>
                 <a:srgbClr val="ffffff"/>
@@ -16919,7 +17751,7 @@
         <p:spPr>
           <a:xfrm>
             <a:off x="0" y="914400"/>
-            <a:ext cx="9143640" cy="54360"/>
+            <a:ext cx="9143280" cy="54000"/>
           </a:xfrm>
           <a:prstGeom prst="rect">
             <a:avLst/>
@@ -16945,6 +17777,11 @@
             <a:noAutofit/>
           </a:bodyPr>
           <a:p>
+            <a:pPr>
+              <a:lnSpc>
+                <a:spcPct val="100000"/>
+              </a:lnSpc>
+            </a:pPr>
             <a:endParaRPr b="0" lang="en-US" sz="1800" spc="-1" strike="noStrike">
               <a:solidFill>
                 <a:srgbClr val="000000"/>
@@ -16963,7 +17800,7 @@
         <p:spPr>
           <a:xfrm>
             <a:off x="411480" y="0"/>
-            <a:ext cx="8320680" cy="914040"/>
+            <a:ext cx="8320320" cy="913680"/>
           </a:xfrm>
           <a:prstGeom prst="rect">
             <a:avLst/>
@@ -17020,7 +17857,7 @@
         <p:spPr>
           <a:xfrm>
             <a:off x="320040" y="1097280"/>
-            <a:ext cx="8503560" cy="914040"/>
+            <a:ext cx="8503200" cy="913680"/>
           </a:xfrm>
           <a:prstGeom prst="rect">
             <a:avLst/>
@@ -17046,6 +17883,11 @@
             <a:noAutofit/>
           </a:bodyPr>
           <a:p>
+            <a:pPr>
+              <a:lnSpc>
+                <a:spcPct val="100000"/>
+              </a:lnSpc>
+            </a:pPr>
             <a:endParaRPr b="0" lang="en-US" sz="1800" spc="-1" strike="noStrike">
               <a:solidFill>
                 <a:srgbClr val="ffffff"/>
@@ -17064,7 +17906,7 @@
         <p:spPr>
           <a:xfrm>
             <a:off x="457200" y="1115640"/>
-            <a:ext cx="8229240" cy="859320"/>
+            <a:ext cx="8228880" cy="858960"/>
           </a:xfrm>
           <a:prstGeom prst="rect">
             <a:avLst/>
@@ -17131,7 +17973,7 @@
         <p:spPr>
           <a:xfrm>
             <a:off x="320040" y="2148840"/>
-            <a:ext cx="4260600" cy="1243080"/>
+            <a:ext cx="4260240" cy="1242720"/>
           </a:xfrm>
           <a:prstGeom prst="rect">
             <a:avLst/>
@@ -17164,6 +18006,11 @@
             <a:noAutofit/>
           </a:bodyPr>
           <a:p>
+            <a:pPr>
+              <a:lnSpc>
+                <a:spcPct val="100000"/>
+              </a:lnSpc>
+            </a:pPr>
             <a:endParaRPr b="0" lang="en-US" sz="1800" spc="-1" strike="noStrike">
               <a:solidFill>
                 <a:srgbClr val="ffffff"/>
@@ -17182,7 +18029,7 @@
         <p:spPr>
           <a:xfrm>
             <a:off x="448200" y="2277000"/>
-            <a:ext cx="456840" cy="456840"/>
+            <a:ext cx="456480" cy="456480"/>
           </a:xfrm>
           <a:prstGeom prst="ellipse">
             <a:avLst/>
@@ -17208,6 +18055,11 @@
             <a:noAutofit/>
           </a:bodyPr>
           <a:p>
+            <a:pPr>
+              <a:lnSpc>
+                <a:spcPct val="100000"/>
+              </a:lnSpc>
+            </a:pPr>
             <a:endParaRPr b="0" lang="en-US" sz="1800" spc="-1" strike="noStrike">
               <a:solidFill>
                 <a:srgbClr val="ffffff"/>
@@ -17226,7 +18078,7 @@
         <p:spPr>
           <a:xfrm>
             <a:off x="448200" y="2277000"/>
-            <a:ext cx="456840" cy="456840"/>
+            <a:ext cx="456480" cy="456480"/>
           </a:xfrm>
           <a:prstGeom prst="rect">
             <a:avLst/>
@@ -17282,7 +18134,7 @@
         <p:spPr>
           <a:xfrm>
             <a:off x="1014840" y="2240280"/>
-            <a:ext cx="3456000" cy="347040"/>
+            <a:ext cx="3455640" cy="346680"/>
           </a:xfrm>
           <a:prstGeom prst="rect">
             <a:avLst/>
@@ -17349,7 +18201,7 @@
         <p:spPr>
           <a:xfrm>
             <a:off x="448200" y="2660760"/>
-            <a:ext cx="4004640" cy="658080"/>
+            <a:ext cx="4004280" cy="657720"/>
           </a:xfrm>
           <a:prstGeom prst="rect">
             <a:avLst/>
@@ -17406,7 +18258,7 @@
         <p:spPr>
           <a:xfrm>
             <a:off x="4782240" y="2148840"/>
-            <a:ext cx="4260600" cy="1243080"/>
+            <a:ext cx="4260240" cy="1242720"/>
           </a:xfrm>
           <a:prstGeom prst="rect">
             <a:avLst/>
@@ -17439,6 +18291,11 @@
             <a:noAutofit/>
           </a:bodyPr>
           <a:p>
+            <a:pPr>
+              <a:lnSpc>
+                <a:spcPct val="100000"/>
+              </a:lnSpc>
+            </a:pPr>
             <a:endParaRPr b="0" lang="en-US" sz="1800" spc="-1" strike="noStrike">
               <a:solidFill>
                 <a:srgbClr val="ffffff"/>
@@ -17457,7 +18314,7 @@
         <p:spPr>
           <a:xfrm>
             <a:off x="4910400" y="2277000"/>
-            <a:ext cx="456840" cy="456840"/>
+            <a:ext cx="456480" cy="456480"/>
           </a:xfrm>
           <a:prstGeom prst="ellipse">
             <a:avLst/>
@@ -17483,6 +18340,11 @@
             <a:noAutofit/>
           </a:bodyPr>
           <a:p>
+            <a:pPr>
+              <a:lnSpc>
+                <a:spcPct val="100000"/>
+              </a:lnSpc>
+            </a:pPr>
             <a:endParaRPr b="0" lang="en-US" sz="1800" spc="-1" strike="noStrike">
               <a:solidFill>
                 <a:srgbClr val="ffffff"/>
@@ -17501,7 +18363,7 @@
         <p:spPr>
           <a:xfrm>
             <a:off x="4910400" y="2277000"/>
-            <a:ext cx="456840" cy="456840"/>
+            <a:ext cx="456480" cy="456480"/>
           </a:xfrm>
           <a:prstGeom prst="rect">
             <a:avLst/>
@@ -17557,7 +18419,7 @@
         <p:spPr>
           <a:xfrm>
             <a:off x="5477400" y="2240280"/>
-            <a:ext cx="3456000" cy="347040"/>
+            <a:ext cx="3455640" cy="346680"/>
           </a:xfrm>
           <a:prstGeom prst="rect">
             <a:avLst/>
@@ -17624,7 +18486,7 @@
         <p:spPr>
           <a:xfrm>
             <a:off x="4910400" y="2660760"/>
-            <a:ext cx="4004640" cy="658080"/>
+            <a:ext cx="4004280" cy="657720"/>
           </a:xfrm>
           <a:prstGeom prst="rect">
             <a:avLst/>
@@ -17681,7 +18543,7 @@
         <p:spPr>
           <a:xfrm>
             <a:off x="320040" y="3538800"/>
-            <a:ext cx="4260600" cy="1243080"/>
+            <a:ext cx="4260240" cy="1242720"/>
           </a:xfrm>
           <a:prstGeom prst="rect">
             <a:avLst/>
@@ -17714,6 +18576,11 @@
             <a:noAutofit/>
           </a:bodyPr>
           <a:p>
+            <a:pPr>
+              <a:lnSpc>
+                <a:spcPct val="100000"/>
+              </a:lnSpc>
+            </a:pPr>
             <a:endParaRPr b="0" lang="en-US" sz="1800" spc="-1" strike="noStrike">
               <a:solidFill>
                 <a:srgbClr val="ffffff"/>
@@ -17732,7 +18599,7 @@
         <p:spPr>
           <a:xfrm>
             <a:off x="448200" y="3666600"/>
-            <a:ext cx="456840" cy="456840"/>
+            <a:ext cx="456480" cy="456480"/>
           </a:xfrm>
           <a:prstGeom prst="ellipse">
             <a:avLst/>
@@ -17758,6 +18625,11 @@
             <a:noAutofit/>
           </a:bodyPr>
           <a:p>
+            <a:pPr>
+              <a:lnSpc>
+                <a:spcPct val="100000"/>
+              </a:lnSpc>
+            </a:pPr>
             <a:endParaRPr b="0" lang="en-US" sz="1800" spc="-1" strike="noStrike">
               <a:solidFill>
                 <a:srgbClr val="ffffff"/>
@@ -17776,7 +18648,7 @@
         <p:spPr>
           <a:xfrm>
             <a:off x="448200" y="3666600"/>
-            <a:ext cx="456840" cy="456840"/>
+            <a:ext cx="456480" cy="456480"/>
           </a:xfrm>
           <a:prstGeom prst="rect">
             <a:avLst/>
@@ -17832,7 +18704,7 @@
         <p:spPr>
           <a:xfrm>
             <a:off x="1014840" y="3630240"/>
-            <a:ext cx="3456000" cy="347040"/>
+            <a:ext cx="3455640" cy="346680"/>
           </a:xfrm>
           <a:prstGeom prst="rect">
             <a:avLst/>
@@ -17899,7 +18771,7 @@
         <p:spPr>
           <a:xfrm>
             <a:off x="448200" y="4050720"/>
-            <a:ext cx="4004640" cy="658080"/>
+            <a:ext cx="4004280" cy="657720"/>
           </a:xfrm>
           <a:prstGeom prst="rect">
             <a:avLst/>
@@ -17956,7 +18828,7 @@
         <p:spPr>
           <a:xfrm>
             <a:off x="4782240" y="3538800"/>
-            <a:ext cx="4260600" cy="1243080"/>
+            <a:ext cx="4260240" cy="1242720"/>
           </a:xfrm>
           <a:prstGeom prst="rect">
             <a:avLst/>
@@ -17989,6 +18861,11 @@
             <a:noAutofit/>
           </a:bodyPr>
           <a:p>
+            <a:pPr>
+              <a:lnSpc>
+                <a:spcPct val="100000"/>
+              </a:lnSpc>
+            </a:pPr>
             <a:endParaRPr b="0" lang="en-US" sz="1800" spc="-1" strike="noStrike">
               <a:solidFill>
                 <a:srgbClr val="ffffff"/>
@@ -18007,7 +18884,7 @@
         <p:spPr>
           <a:xfrm>
             <a:off x="4910400" y="3666600"/>
-            <a:ext cx="456840" cy="456840"/>
+            <a:ext cx="456480" cy="456480"/>
           </a:xfrm>
           <a:prstGeom prst="ellipse">
             <a:avLst/>
@@ -18033,6 +18910,11 @@
             <a:noAutofit/>
           </a:bodyPr>
           <a:p>
+            <a:pPr>
+              <a:lnSpc>
+                <a:spcPct val="100000"/>
+              </a:lnSpc>
+            </a:pPr>
             <a:endParaRPr b="0" lang="en-US" sz="1800" spc="-1" strike="noStrike">
               <a:solidFill>
                 <a:srgbClr val="ffffff"/>
@@ -18051,7 +18933,7 @@
         <p:spPr>
           <a:xfrm>
             <a:off x="4910400" y="3666600"/>
-            <a:ext cx="456840" cy="456840"/>
+            <a:ext cx="456480" cy="456480"/>
           </a:xfrm>
           <a:prstGeom prst="rect">
             <a:avLst/>
@@ -18107,7 +18989,7 @@
         <p:spPr>
           <a:xfrm>
             <a:off x="5477400" y="3630240"/>
-            <a:ext cx="3456000" cy="347040"/>
+            <a:ext cx="3455640" cy="346680"/>
           </a:xfrm>
           <a:prstGeom prst="rect">
             <a:avLst/>
@@ -18174,7 +19056,7 @@
         <p:spPr>
           <a:xfrm>
             <a:off x="4910400" y="4050720"/>
-            <a:ext cx="4004640" cy="658080"/>
+            <a:ext cx="4004280" cy="657720"/>
           </a:xfrm>
           <a:prstGeom prst="rect">
             <a:avLst/>
